--- a/Agentic_AI_Seminar/Agentic_AI_Seminar_Simple_English.pptx
+++ b/Agentic_AI_Seminar/Agentic_AI_Seminar_Simple_English.pptx
@@ -4,26 +4,29 @@
   <p:sldMasterIdLst>
     <p:sldMasterId id="2147483648" r:id="rId1"/>
   </p:sldMasterIdLst>
+  <p:notesMasterIdLst>
+    <p:notesMasterId r:id="rId19"/>
+  </p:notesMasterIdLst>
   <p:sldIdLst>
-    <p:sldId id="256" r:id="rId7"/>
-    <p:sldId id="257" r:id="rId9"/>
-    <p:sldId id="258" r:id="rId10"/>
-    <p:sldId id="259" r:id="rId11"/>
-    <p:sldId id="260" r:id="rId12"/>
-    <p:sldId id="261" r:id="rId13"/>
-    <p:sldId id="262" r:id="rId14"/>
-    <p:sldId id="263" r:id="rId15"/>
-    <p:sldId id="264" r:id="rId16"/>
-    <p:sldId id="265" r:id="rId17"/>
-    <p:sldId id="266" r:id="rId18"/>
-    <p:sldId id="267" r:id="rId19"/>
-    <p:sldId id="268" r:id="rId20"/>
-    <p:sldId id="269" r:id="rId21"/>
-    <p:sldId id="270" r:id="rId22"/>
-    <p:sldId id="271" r:id="rId23"/>
-    <p:sldId id="272" r:id="rId24"/>
+    <p:sldId id="256" r:id="rId2"/>
+    <p:sldId id="257" r:id="rId3"/>
+    <p:sldId id="258" r:id="rId4"/>
+    <p:sldId id="259" r:id="rId5"/>
+    <p:sldId id="260" r:id="rId6"/>
+    <p:sldId id="261" r:id="rId7"/>
+    <p:sldId id="262" r:id="rId8"/>
+    <p:sldId id="263" r:id="rId9"/>
+    <p:sldId id="264" r:id="rId10"/>
+    <p:sldId id="265" r:id="rId11"/>
+    <p:sldId id="266" r:id="rId12"/>
+    <p:sldId id="267" r:id="rId13"/>
+    <p:sldId id="268" r:id="rId14"/>
+    <p:sldId id="269" r:id="rId15"/>
+    <p:sldId id="270" r:id="rId16"/>
+    <p:sldId id="271" r:id="rId17"/>
+    <p:sldId id="272" r:id="rId18"/>
   </p:sldIdLst>
-  <p:sldSz cx="12191695" cy="6858000" type="screen4x3"/>
+  <p:sldSz cx="12192000" cy="6858000"/>
   <p:notesSz cx="6858000" cy="9144000"/>
   <p:defaultTextStyle>
     <a:defPPr>
@@ -120,11 +123,27 @@
       </a:defRPr>
     </a:lvl9pPr>
   </p:defaultTextStyle>
+  <p:extLst>
+    <p:ext uri="{EFAFB233-063F-42B5-8137-9DF3F51BA10A}">
+      <p15:sldGuideLst xmlns:p15="http://schemas.microsoft.com/office/powerpoint/2012/main">
+        <p15:guide id="1" orient="horz" pos="2160">
+          <p15:clr>
+            <a:srgbClr val="A4A3A4"/>
+          </p15:clr>
+        </p15:guide>
+        <p15:guide id="2" pos="2880">
+          <p15:clr>
+            <a:srgbClr val="A4A3A4"/>
+          </p15:clr>
+        </p15:guide>
+      </p15:sldGuideLst>
+    </p:ext>
+  </p:extLst>
 </p:presentation>
 </file>
 
 <file path=ppt/notesMasters/notesMaster1.xml><?xml version="1.0" encoding="utf-8"?>
-<p:notesMaster xmlns:a="http://schemas.openxmlformats.org/drawingml/2006/main" xmlns:p="http://schemas.openxmlformats.org/presentationml/2006/main" xmlns:r="http://schemas.openxmlformats.org/officeDocument/2006/relationships">
+<p:notesMaster xmlns:a="http://schemas.openxmlformats.org/drawingml/2006/main" xmlns:r="http://schemas.openxmlformats.org/officeDocument/2006/relationships" xmlns:p="http://schemas.openxmlformats.org/presentationml/2006/main">
   <p:cSld>
     <p:bg>
       <p:bgRef idx="1001">
@@ -145,241 +164,16 @@
           <a:chExt cx="0" cy="0"/>
         </a:xfrm>
       </p:grpSpPr>
-      <p:sp>
-        <p:nvSpPr>
-          <p:cNvPr id="2" name="Header Placeholder 1"/>
-          <p:cNvSpPr>
-            <a:spLocks noGrp="1"/>
-          </p:cNvSpPr>
-          <p:nvPr>
-            <p:ph type="hdr" sz="quarter"/>
-          </p:nvPr>
-        </p:nvSpPr>
-        <p:spPr>
-          <a:xfrm>
-            <a:off x="0" y="0"/>
-            <a:ext cx="2971800" cy="457200"/>
-          </a:xfrm>
-          <a:prstGeom prst="rect">
-            <a:avLst/>
-          </a:prstGeom>
-        </p:spPr>
-        <p:txBody>
-          <a:bodyPr vert="horz" lIns="91440" tIns="45720" rIns="91440" bIns="45720" rtlCol="0"/>
-          <a:lstStyle>
-            <a:lvl1pPr algn="l">
-              <a:defRPr sz="1200"/>
-            </a:lvl1pPr>
-          </a:lstStyle>
-          <a:p>
-            <a:endParaRPr lang="en-US"/>
-          </a:p>
-        </p:txBody>
-      </p:sp>
-      <p:sp>
-        <p:nvSpPr>
-          <p:cNvPr id="3" name="Date Placeholder 2"/>
-          <p:cNvSpPr>
-            <a:spLocks noGrp="1"/>
-          </p:cNvSpPr>
-          <p:nvPr>
-            <p:ph type="dt" idx="1"/>
-          </p:nvPr>
-        </p:nvSpPr>
-        <p:spPr>
-          <a:xfrm>
-            <a:off x="3884613" y="0"/>
-            <a:ext cx="2971800" cy="457200"/>
-          </a:xfrm>
-          <a:prstGeom prst="rect">
-            <a:avLst/>
-          </a:prstGeom>
-        </p:spPr>
-        <p:txBody>
-          <a:bodyPr vert="horz" lIns="91440" tIns="45720" rIns="91440" bIns="45720" rtlCol="0"/>
-          <a:lstStyle>
-            <a:lvl1pPr algn="r">
-              <a:defRPr sz="1200"/>
-            </a:lvl1pPr>
-          </a:lstStyle>
-          <a:p>
-            <a:fld id="{0F89C1C7-3DCD-1040-A9CF-14679D8B5DDD}" type="datetimeFigureOut">
-              <a:rPr lang="en-US" smtClean="0"/>
-              <a:t>10/17/16</a:t>
-            </a:fld>
-            <a:endParaRPr lang="en-US"/>
-          </a:p>
-        </p:txBody>
-      </p:sp>
-      <p:sp>
-        <p:nvSpPr>
-          <p:cNvPr id="4" name="Slide Image Placeholder 3"/>
-          <p:cNvSpPr>
-            <a:spLocks noGrp="1" noRot="1" noChangeAspect="1"/>
-          </p:cNvSpPr>
-          <p:nvPr>
-            <p:ph type="sldImg" idx="2"/>
-          </p:nvPr>
-        </p:nvSpPr>
-        <p:spPr>
-          <a:xfrm>
-            <a:off x="1143000" y="685800"/>
-            <a:ext cx="4572000" cy="3429000"/>
-          </a:xfrm>
-          <a:prstGeom prst="rect">
-            <a:avLst/>
-          </a:prstGeom>
-          <a:noFill/>
-          <a:ln w="12700">
-            <a:solidFill>
-              <a:prstClr val="black"/>
-            </a:solidFill>
-          </a:ln>
-        </p:spPr>
-        <p:txBody>
-          <a:bodyPr vert="horz" lIns="91440" tIns="45720" rIns="91440" bIns="45720" rtlCol="0" anchor="ctr"/>
-          <a:lstStyle/>
-          <a:p>
-            <a:endParaRPr lang="en-US"/>
-          </a:p>
-        </p:txBody>
-      </p:sp>
-      <p:sp>
-        <p:nvSpPr>
-          <p:cNvPr id="5" name="Notes Placeholder 4"/>
-          <p:cNvSpPr>
-            <a:spLocks noGrp="1"/>
-          </p:cNvSpPr>
-          <p:nvPr>
-            <p:ph type="body" sz="quarter" idx="3"/>
-          </p:nvPr>
-        </p:nvSpPr>
-        <p:spPr>
-          <a:xfrm>
-            <a:off x="685800" y="4343400"/>
-            <a:ext cx="5486400" cy="4114800"/>
-          </a:xfrm>
-          <a:prstGeom prst="rect">
-            <a:avLst/>
-          </a:prstGeom>
-        </p:spPr>
-        <p:txBody>
-          <a:bodyPr vert="horz" lIns="91440" tIns="45720" rIns="91440" bIns="45720" rtlCol="0"/>
-          <a:lstStyle/>
-          <a:p>
-            <a:pPr lvl="0"/>
-            <a:r>
-              <a:rPr lang="en-US" smtClean="0"/>
-              <a:t>Click to edit Master text styles</a:t>
-            </a:r>
-          </a:p>
-          <a:p>
-            <a:pPr lvl="1"/>
-            <a:r>
-              <a:rPr lang="en-US" smtClean="0"/>
-              <a:t>Second level</a:t>
-            </a:r>
-          </a:p>
-          <a:p>
-            <a:pPr lvl="2"/>
-            <a:r>
-              <a:rPr lang="en-US" smtClean="0"/>
-              <a:t>Third level</a:t>
-            </a:r>
-          </a:p>
-          <a:p>
-            <a:pPr lvl="3"/>
-            <a:r>
-              <a:rPr lang="en-US" smtClean="0"/>
-              <a:t>Fourth level</a:t>
-            </a:r>
-          </a:p>
-          <a:p>
-            <a:pPr lvl="4"/>
-            <a:r>
-              <a:rPr lang="en-US" smtClean="0"/>
-              <a:t>Fifth level</a:t>
-            </a:r>
-            <a:endParaRPr lang="en-US"/>
-          </a:p>
-        </p:txBody>
-      </p:sp>
-      <p:sp>
-        <p:nvSpPr>
-          <p:cNvPr id="6" name="Footer Placeholder 5"/>
-          <p:cNvSpPr>
-            <a:spLocks noGrp="1"/>
-          </p:cNvSpPr>
-          <p:nvPr>
-            <p:ph type="ftr" sz="quarter" idx="4"/>
-          </p:nvPr>
-        </p:nvSpPr>
-        <p:spPr>
-          <a:xfrm>
-            <a:off x="0" y="8685213"/>
-            <a:ext cx="2971800" cy="457200"/>
-          </a:xfrm>
-          <a:prstGeom prst="rect">
-            <a:avLst/>
-          </a:prstGeom>
-        </p:spPr>
-        <p:txBody>
-          <a:bodyPr vert="horz" lIns="91440" tIns="45720" rIns="91440" bIns="45720" rtlCol="0" anchor="b"/>
-          <a:lstStyle>
-            <a:lvl1pPr algn="l">
-              <a:defRPr sz="1200"/>
-            </a:lvl1pPr>
-          </a:lstStyle>
-          <a:p>
-            <a:endParaRPr lang="en-US"/>
-          </a:p>
-        </p:txBody>
-      </p:sp>
-      <p:sp>
-        <p:nvSpPr>
-          <p:cNvPr id="7" name="Slide Number Placeholder 6"/>
-          <p:cNvSpPr>
-            <a:spLocks noGrp="1"/>
-          </p:cNvSpPr>
-          <p:nvPr>
-            <p:ph type="sldNum" sz="quarter" idx="5"/>
-          </p:nvPr>
-        </p:nvSpPr>
-        <p:spPr>
-          <a:xfrm>
-            <a:off x="3884613" y="8685213"/>
-            <a:ext cx="2971800" cy="457200"/>
-          </a:xfrm>
-          <a:prstGeom prst="rect">
-            <a:avLst/>
-          </a:prstGeom>
-        </p:spPr>
-        <p:txBody>
-          <a:bodyPr vert="horz" lIns="91440" tIns="45720" rIns="91440" bIns="45720" rtlCol="0" anchor="b"/>
-          <a:lstStyle>
-            <a:lvl1pPr algn="r">
-              <a:defRPr sz="1200"/>
-            </a:lvl1pPr>
-          </a:lstStyle>
-          <a:p>
-            <a:fld id="{BB5E49A5-4136-284D-997B-48E1D791AD67}" type="slidenum">
-              <a:rPr lang="en-US" smtClean="0"/>
-              <a:t>‹#›</a:t>
-            </a:fld>
-            <a:endParaRPr lang="en-US"/>
-          </a:p>
-        </p:txBody>
-      </p:sp>
     </p:spTree>
     <p:extLst>
       <p:ext uri="{BB962C8B-B14F-4D97-AF65-F5344CB8AC3E}">
-        <p14:creationId xmlns:p14="http://schemas.microsoft.com/office/powerpoint/2010/main" val="2623252185"/>
+        <p14:creationId xmlns:p14="http://schemas.microsoft.com/office/powerpoint/2010/main" val="3086227745"/>
       </p:ext>
     </p:extLst>
   </p:cSld>
   <p:clrMap bg1="lt1" tx1="dk1" bg2="lt2" tx2="dk2" accent1="accent1" accent2="accent2" accent3="accent3" accent4="accent4" accent5="accent5" accent6="accent6" hlink="hlink" folHlink="folHlink"/>
   <p:notesStyle>
-    <a:lvl1pPr marL="0" algn="l" defTabSz="457200" rtl="0" eaLnBrk="1" latinLnBrk="0" hangingPunct="1">
+    <a:lvl1pPr marL="0" algn="l" defTabSz="914400" rtl="0" eaLnBrk="1" latinLnBrk="0" hangingPunct="1">
       <a:defRPr sz="1200" kern="1200">
         <a:solidFill>
           <a:schemeClr val="tx1"/>
@@ -389,7 +183,7 @@
         <a:cs typeface="+mn-cs"/>
       </a:defRPr>
     </a:lvl1pPr>
-    <a:lvl2pPr marL="457200" algn="l" defTabSz="457200" rtl="0" eaLnBrk="1" latinLnBrk="0" hangingPunct="1">
+    <a:lvl2pPr marL="457200" algn="l" defTabSz="914400" rtl="0" eaLnBrk="1" latinLnBrk="0" hangingPunct="1">
       <a:defRPr sz="1200" kern="1200">
         <a:solidFill>
           <a:schemeClr val="tx1"/>
@@ -399,7 +193,7 @@
         <a:cs typeface="+mn-cs"/>
       </a:defRPr>
     </a:lvl2pPr>
-    <a:lvl3pPr marL="914400" algn="l" defTabSz="457200" rtl="0" eaLnBrk="1" latinLnBrk="0" hangingPunct="1">
+    <a:lvl3pPr marL="914400" algn="l" defTabSz="914400" rtl="0" eaLnBrk="1" latinLnBrk="0" hangingPunct="1">
       <a:defRPr sz="1200" kern="1200">
         <a:solidFill>
           <a:schemeClr val="tx1"/>
@@ -409,7 +203,7 @@
         <a:cs typeface="+mn-cs"/>
       </a:defRPr>
     </a:lvl3pPr>
-    <a:lvl4pPr marL="1371600" algn="l" defTabSz="457200" rtl="0" eaLnBrk="1" latinLnBrk="0" hangingPunct="1">
+    <a:lvl4pPr marL="1371600" algn="l" defTabSz="914400" rtl="0" eaLnBrk="1" latinLnBrk="0" hangingPunct="1">
       <a:defRPr sz="1200" kern="1200">
         <a:solidFill>
           <a:schemeClr val="tx1"/>
@@ -419,7 +213,7 @@
         <a:cs typeface="+mn-cs"/>
       </a:defRPr>
     </a:lvl4pPr>
-    <a:lvl5pPr marL="1828800" algn="l" defTabSz="457200" rtl="0" eaLnBrk="1" latinLnBrk="0" hangingPunct="1">
+    <a:lvl5pPr marL="1828800" algn="l" defTabSz="914400" rtl="0" eaLnBrk="1" latinLnBrk="0" hangingPunct="1">
       <a:defRPr sz="1200" kern="1200">
         <a:solidFill>
           <a:schemeClr val="tx1"/>
@@ -429,7 +223,7 @@
         <a:cs typeface="+mn-cs"/>
       </a:defRPr>
     </a:lvl5pPr>
-    <a:lvl6pPr marL="2286000" algn="l" defTabSz="457200" rtl="0" eaLnBrk="1" latinLnBrk="0" hangingPunct="1">
+    <a:lvl6pPr marL="2286000" algn="l" defTabSz="914400" rtl="0" eaLnBrk="1" latinLnBrk="0" hangingPunct="1">
       <a:defRPr sz="1200" kern="1200">
         <a:solidFill>
           <a:schemeClr val="tx1"/>
@@ -439,7 +233,7 @@
         <a:cs typeface="+mn-cs"/>
       </a:defRPr>
     </a:lvl6pPr>
-    <a:lvl7pPr marL="2743200" algn="l" defTabSz="457200" rtl="0" eaLnBrk="1" latinLnBrk="0" hangingPunct="1">
+    <a:lvl7pPr marL="2743200" algn="l" defTabSz="914400" rtl="0" eaLnBrk="1" latinLnBrk="0" hangingPunct="1">
       <a:defRPr sz="1200" kern="1200">
         <a:solidFill>
           <a:schemeClr val="tx1"/>
@@ -449,7 +243,7 @@
         <a:cs typeface="+mn-cs"/>
       </a:defRPr>
     </a:lvl7pPr>
-    <a:lvl8pPr marL="3200400" algn="l" defTabSz="457200" rtl="0" eaLnBrk="1" latinLnBrk="0" hangingPunct="1">
+    <a:lvl8pPr marL="3200400" algn="l" defTabSz="914400" rtl="0" eaLnBrk="1" latinLnBrk="0" hangingPunct="1">
       <a:defRPr sz="1200" kern="1200">
         <a:solidFill>
           <a:schemeClr val="tx1"/>
@@ -459,7 +253,7 @@
         <a:cs typeface="+mn-cs"/>
       </a:defRPr>
     </a:lvl8pPr>
-    <a:lvl9pPr marL="3657600" algn="l" defTabSz="457200" rtl="0" eaLnBrk="1" latinLnBrk="0" hangingPunct="1">
+    <a:lvl9pPr marL="3657600" algn="l" defTabSz="914400" rtl="0" eaLnBrk="1" latinLnBrk="0" hangingPunct="1">
       <a:defRPr sz="1200" kern="1200">
         <a:solidFill>
           <a:schemeClr val="tx1"/>
@@ -474,7 +268,7 @@
 </file>
 
 <file path=ppt/notesSlides/notesSlide1.xml><?xml version="1.0" encoding="utf-8"?>
-<p:notes xmlns:a="http://schemas.openxmlformats.org/drawingml/2006/main" xmlns:p="http://schemas.openxmlformats.org/presentationml/2006/main" xmlns:r="http://schemas.openxmlformats.org/officeDocument/2006/relationships">
+<p:notes xmlns:a="http://schemas.openxmlformats.org/drawingml/2006/main" xmlns:r="http://schemas.openxmlformats.org/officeDocument/2006/relationships" xmlns:p="http://schemas.openxmlformats.org/presentationml/2006/main">
   <p:cSld>
     <p:spTree>
       <p:nvGrpSpPr>
@@ -494,7 +288,7 @@
         <p:nvSpPr>
           <p:cNvPr id="2" name="Slide Image Placeholder 1"/>
           <p:cNvSpPr>
-            <a:spLocks noGrp="1"/>
+            <a:spLocks noGrp="1" noRot="1" noChangeAspect="1"/>
           </p:cNvSpPr>
           <p:nvPr>
             <p:ph type="sldImg" idx="2"/>
@@ -509,7 +303,7 @@
             <a:spLocks noGrp="1"/>
           </p:cNvSpPr>
           <p:nvPr>
-            <p:ph type="body" idx="3" sz="quarter"/>
+            <p:ph type="body" sz="quarter" idx="3"/>
           </p:nvPr>
         </p:nvSpPr>
         <p:spPr/>
@@ -526,13 +320,17 @@
               <a:t>'Good morning respected teachers, guide, and my dear friends.</a:t>
             </a:r>
           </a:p>
-          <a:p/>
+          <a:p>
+            <a:endParaRPr/>
+          </a:p>
           <a:p>
             <a:r>
               <a:t>Today, I am presenting my technical seminar on 'Agentic AI: The Evolution from Chatbots to Autonomous AI Systems'.</a:t>
             </a:r>
           </a:p>
-          <a:p/>
+          <a:p>
+            <a:endParaRPr/>
+          </a:p>
           <a:p>
             <a:r>
               <a:t>We all know ChatGPT. If you ask it to write code, it gives you text. But who has to copy the code, test it, and fix errors? WE do!</a:t>
@@ -552,7 +350,7 @@
             <a:spLocks noGrp="1"/>
           </p:cNvSpPr>
           <p:nvPr>
-            <p:ph type="sldNum" idx="5" sz="quarter"/>
+            <p:ph type="sldNum" sz="quarter" idx="5"/>
           </p:nvPr>
         </p:nvSpPr>
         <p:spPr/>
@@ -566,7 +364,7 @@
 </file>
 
 <file path=ppt/notesSlides/notesSlide10.xml><?xml version="1.0" encoding="utf-8"?>
-<p:notes xmlns:a="http://schemas.openxmlformats.org/drawingml/2006/main" xmlns:p="http://schemas.openxmlformats.org/presentationml/2006/main" xmlns:r="http://schemas.openxmlformats.org/officeDocument/2006/relationships">
+<p:notes xmlns:a="http://schemas.openxmlformats.org/drawingml/2006/main" xmlns:r="http://schemas.openxmlformats.org/officeDocument/2006/relationships" xmlns:p="http://schemas.openxmlformats.org/presentationml/2006/main">
   <p:cSld>
     <p:spTree>
       <p:nvGrpSpPr>
@@ -586,7 +384,7 @@
         <p:nvSpPr>
           <p:cNvPr id="2" name="Slide Image Placeholder 1"/>
           <p:cNvSpPr>
-            <a:spLocks noGrp="1"/>
+            <a:spLocks noGrp="1" noRot="1" noChangeAspect="1"/>
           </p:cNvSpPr>
           <p:nvPr>
             <p:ph type="sldImg" idx="2"/>
@@ -601,7 +399,7 @@
             <a:spLocks noGrp="1"/>
           </p:cNvSpPr>
           <p:nvPr>
-            <p:ph type="body" idx="3" sz="quarter"/>
+            <p:ph type="body" sz="quarter" idx="3"/>
           </p:nvPr>
         </p:nvSpPr>
         <p:spPr/>
@@ -618,7 +416,9 @@
               <a:t>'Let's look at a famous real-world case study: Devin, built by Cognition AI.</a:t>
             </a:r>
           </a:p>
-          <a:p/>
+          <a:p>
+            <a:endParaRPr/>
+          </a:p>
           <a:p>
             <a:r>
               <a:t>In software companies, engineers waste hours hunting down small bugs.</a:t>
@@ -634,7 +434,9 @@
               <a:t>It opened the code, ran the tests, saw why it failed, edited the file, and re-tested until it was 100% fixed.</a:t>
             </a:r>
           </a:p>
-          <a:p/>
+          <a:p>
+            <a:endParaRPr/>
+          </a:p>
           <a:p>
             <a:r>
               <a:t>On the official benchmark called SWE-bench, regular ChatGPT could only solve under 2% of issues, but Devin solved nearly 14% unassisted. That proved to the entire tech world that Agentic AI is real and practical.'</a:t>
@@ -649,7 +451,7 @@
             <a:spLocks noGrp="1"/>
           </p:cNvSpPr>
           <p:nvPr>
-            <p:ph type="sldNum" idx="5" sz="quarter"/>
+            <p:ph type="sldNum" sz="quarter" idx="5"/>
           </p:nvPr>
         </p:nvSpPr>
         <p:spPr/>
@@ -663,7 +465,7 @@
 </file>
 
 <file path=ppt/notesSlides/notesSlide11.xml><?xml version="1.0" encoding="utf-8"?>
-<p:notes xmlns:a="http://schemas.openxmlformats.org/drawingml/2006/main" xmlns:p="http://schemas.openxmlformats.org/presentationml/2006/main" xmlns:r="http://schemas.openxmlformats.org/officeDocument/2006/relationships">
+<p:notes xmlns:a="http://schemas.openxmlformats.org/drawingml/2006/main" xmlns:r="http://schemas.openxmlformats.org/officeDocument/2006/relationships" xmlns:p="http://schemas.openxmlformats.org/presentationml/2006/main">
   <p:cSld>
     <p:spTree>
       <p:nvGrpSpPr>
@@ -683,7 +485,7 @@
         <p:nvSpPr>
           <p:cNvPr id="2" name="Slide Image Placeholder 1"/>
           <p:cNvSpPr>
-            <a:spLocks noGrp="1"/>
+            <a:spLocks noGrp="1" noRot="1" noChangeAspect="1"/>
           </p:cNvSpPr>
           <p:nvPr>
             <p:ph type="sldImg" idx="2"/>
@@ -698,7 +500,7 @@
             <a:spLocks noGrp="1"/>
           </p:cNvSpPr>
           <p:nvPr>
-            <p:ph type="body" idx="3" sz="quarter"/>
+            <p:ph type="body" sz="quarter" idx="3"/>
           </p:nvPr>
         </p:nvSpPr>
         <p:spPr/>
@@ -715,7 +517,9 @@
               <a:t>'The advantages of Agentic AI are huge:</a:t>
             </a:r>
           </a:p>
-          <a:p/>
+          <a:p>
+            <a:endParaRPr/>
+          </a:p>
           <a:p>
             <a:r>
               <a:t>First, it works end-to-end without constant prompting.</a:t>
@@ -750,7 +554,7 @@
             <a:spLocks noGrp="1"/>
           </p:cNvSpPr>
           <p:nvPr>
-            <p:ph type="sldNum" idx="5" sz="quarter"/>
+            <p:ph type="sldNum" sz="quarter" idx="5"/>
           </p:nvPr>
         </p:nvSpPr>
         <p:spPr/>
@@ -764,7 +568,7 @@
 </file>
 
 <file path=ppt/notesSlides/notesSlide12.xml><?xml version="1.0" encoding="utf-8"?>
-<p:notes xmlns:a="http://schemas.openxmlformats.org/drawingml/2006/main" xmlns:p="http://schemas.openxmlformats.org/presentationml/2006/main" xmlns:r="http://schemas.openxmlformats.org/officeDocument/2006/relationships">
+<p:notes xmlns:a="http://schemas.openxmlformats.org/drawingml/2006/main" xmlns:r="http://schemas.openxmlformats.org/officeDocument/2006/relationships" xmlns:p="http://schemas.openxmlformats.org/presentationml/2006/main">
   <p:cSld>
     <p:spTree>
       <p:nvGrpSpPr>
@@ -784,7 +588,7 @@
         <p:nvSpPr>
           <p:cNvPr id="2" name="Slide Image Placeholder 1"/>
           <p:cNvSpPr>
-            <a:spLocks noGrp="1"/>
+            <a:spLocks noGrp="1" noRot="1" noChangeAspect="1"/>
           </p:cNvSpPr>
           <p:nvPr>
             <p:ph type="sldImg" idx="2"/>
@@ -799,7 +603,7 @@
             <a:spLocks noGrp="1"/>
           </p:cNvSpPr>
           <p:nvPr>
-            <p:ph type="body" idx="3" sz="quarter"/>
+            <p:ph type="body" sz="quarter" idx="3"/>
           </p:nvPr>
         </p:nvSpPr>
         <p:spPr/>
@@ -816,7 +620,9 @@
               <a:t>'Of course, no technology is perfect. What are the limitations?</a:t>
             </a:r>
           </a:p>
-          <a:p/>
+          <a:p>
+            <a:endParaRPr/>
+          </a:p>
           <a:p>
             <a:r>
               <a:t>First, compounding errors: if Step 1 is wrong, the remaining 9 steps will also fail.</a:t>
@@ -837,7 +643,9 @@
               <a:t>And fourth, infinite loops: sometimes the agent gets confused and repeats the same failed command.</a:t>
             </a:r>
           </a:p>
-          <a:p/>
+          <a:p>
+            <a:endParaRPr/>
+          </a:p>
           <a:p>
             <a:r>
               <a:t>That is why human engineers must always supervise critical actions like financial payments or database deletions.'</a:t>
@@ -852,7 +660,7 @@
             <a:spLocks noGrp="1"/>
           </p:cNvSpPr>
           <p:nvPr>
-            <p:ph type="sldNum" idx="5" sz="quarter"/>
+            <p:ph type="sldNum" sz="quarter" idx="5"/>
           </p:nvPr>
         </p:nvSpPr>
         <p:spPr/>
@@ -866,7 +674,7 @@
 </file>
 
 <file path=ppt/notesSlides/notesSlide13.xml><?xml version="1.0" encoding="utf-8"?>
-<p:notes xmlns:a="http://schemas.openxmlformats.org/drawingml/2006/main" xmlns:p="http://schemas.openxmlformats.org/presentationml/2006/main" xmlns:r="http://schemas.openxmlformats.org/officeDocument/2006/relationships">
+<p:notes xmlns:a="http://schemas.openxmlformats.org/drawingml/2006/main" xmlns:r="http://schemas.openxmlformats.org/officeDocument/2006/relationships" xmlns:p="http://schemas.openxmlformats.org/presentationml/2006/main">
   <p:cSld>
     <p:spTree>
       <p:nvGrpSpPr>
@@ -886,7 +694,7 @@
         <p:nvSpPr>
           <p:cNvPr id="2" name="Slide Image Placeholder 1"/>
           <p:cNvSpPr>
-            <a:spLocks noGrp="1"/>
+            <a:spLocks noGrp="1" noRot="1" noChangeAspect="1"/>
           </p:cNvSpPr>
           <p:nvPr>
             <p:ph type="sldImg" idx="2"/>
@@ -901,7 +709,7 @@
             <a:spLocks noGrp="1"/>
           </p:cNvSpPr>
           <p:nvPr>
-            <p:ph type="body" idx="3" sz="quarter"/>
+            <p:ph type="body" sz="quarter" idx="3"/>
           </p:nvPr>
         </p:nvSpPr>
         <p:spPr/>
@@ -918,7 +726,9 @@
               <a:t>'On this slide, we map Agentic AI directly to the 9 industry outcomes outlined in our MSBTE seminar guidelines.</a:t>
             </a:r>
           </a:p>
-          <a:p/>
+          <a:p>
+            <a:endParaRPr/>
+          </a:p>
           <a:p>
             <a:r>
               <a:t>It improves Productivity, Quality, and Efficiency, while reducing Time and Cost.</a:t>
@@ -938,7 +748,7 @@
             <a:spLocks noGrp="1"/>
           </p:cNvSpPr>
           <p:nvPr>
-            <p:ph type="sldNum" idx="5" sz="quarter"/>
+            <p:ph type="sldNum" sz="quarter" idx="5"/>
           </p:nvPr>
         </p:nvSpPr>
         <p:spPr/>
@@ -952,7 +762,7 @@
 </file>
 
 <file path=ppt/notesSlides/notesSlide14.xml><?xml version="1.0" encoding="utf-8"?>
-<p:notes xmlns:a="http://schemas.openxmlformats.org/drawingml/2006/main" xmlns:p="http://schemas.openxmlformats.org/presentationml/2006/main" xmlns:r="http://schemas.openxmlformats.org/officeDocument/2006/relationships">
+<p:notes xmlns:a="http://schemas.openxmlformats.org/drawingml/2006/main" xmlns:r="http://schemas.openxmlformats.org/officeDocument/2006/relationships" xmlns:p="http://schemas.openxmlformats.org/presentationml/2006/main">
   <p:cSld>
     <p:spTree>
       <p:nvGrpSpPr>
@@ -972,7 +782,7 @@
         <p:nvSpPr>
           <p:cNvPr id="2" name="Slide Image Placeholder 1"/>
           <p:cNvSpPr>
-            <a:spLocks noGrp="1"/>
+            <a:spLocks noGrp="1" noRot="1" noChangeAspect="1"/>
           </p:cNvSpPr>
           <p:nvPr>
             <p:ph type="sldImg" idx="2"/>
@@ -987,7 +797,7 @@
             <a:spLocks noGrp="1"/>
           </p:cNvSpPr>
           <p:nvPr>
-            <p:ph type="body" idx="3" sz="quarter"/>
+            <p:ph type="body" sz="quarter" idx="3"/>
           </p:nvPr>
         </p:nvSpPr>
         <p:spPr/>
@@ -1004,13 +814,17 @@
               <a:t>'What does this mean for us as Diploma Computer Engineering students?</a:t>
             </a:r>
           </a:p>
-          <a:p/>
+          <a:p>
+            <a:endParaRPr/>
+          </a:p>
           <a:p>
             <a:r>
               <a:t>Industry no longer just looks for basic C++ or Java syntax. Today, companies want students who know Python, understand APIs, and know how to connect AI models with tools using LangChain and Docker.</a:t>
             </a:r>
           </a:p>
-          <a:p/>
+          <a:p>
+            <a:endParaRPr/>
+          </a:p>
           <a:p>
             <a:r>
               <a:t>Roles like 'AI Agent Developer' and 'Generative AI Engineer' are among the highest-paying and fastest-growing jobs in tech today.'</a:t>
@@ -1025,7 +839,7 @@
             <a:spLocks noGrp="1"/>
           </p:cNvSpPr>
           <p:nvPr>
-            <p:ph type="sldNum" idx="5" sz="quarter"/>
+            <p:ph type="sldNum" sz="quarter" idx="5"/>
           </p:nvPr>
         </p:nvSpPr>
         <p:spPr/>
@@ -1039,7 +853,7 @@
 </file>
 
 <file path=ppt/notesSlides/notesSlide15.xml><?xml version="1.0" encoding="utf-8"?>
-<p:notes xmlns:a="http://schemas.openxmlformats.org/drawingml/2006/main" xmlns:p="http://schemas.openxmlformats.org/presentationml/2006/main" xmlns:r="http://schemas.openxmlformats.org/officeDocument/2006/relationships">
+<p:notes xmlns:a="http://schemas.openxmlformats.org/drawingml/2006/main" xmlns:r="http://schemas.openxmlformats.org/officeDocument/2006/relationships" xmlns:p="http://schemas.openxmlformats.org/presentationml/2006/main">
   <p:cSld>
     <p:spTree>
       <p:nvGrpSpPr>
@@ -1059,7 +873,7 @@
         <p:nvSpPr>
           <p:cNvPr id="2" name="Slide Image Placeholder 1"/>
           <p:cNvSpPr>
-            <a:spLocks noGrp="1"/>
+            <a:spLocks noGrp="1" noRot="1" noChangeAspect="1"/>
           </p:cNvSpPr>
           <p:nvPr>
             <p:ph type="sldImg" idx="2"/>
@@ -1074,7 +888,7 @@
             <a:spLocks noGrp="1"/>
           </p:cNvSpPr>
           <p:nvPr>
-            <p:ph type="body" idx="3" sz="quarter"/>
+            <p:ph type="body" sz="quarter" idx="3"/>
           </p:nvPr>
         </p:nvSpPr>
         <p:spPr/>
@@ -1091,7 +905,9 @@
               <a:t>'What is the future scope? Here is what is coming in the next few years:</a:t>
             </a:r>
           </a:p>
-          <a:p/>
+          <a:p>
+            <a:endParaRPr/>
+          </a:p>
           <a:p>
             <a:r>
               <a:t>1. Multi-Agent Swarms: Whole virtual software teams made of AI agents working together.</a:t>
@@ -1121,7 +937,7 @@
             <a:spLocks noGrp="1"/>
           </p:cNvSpPr>
           <p:nvPr>
-            <p:ph type="sldNum" idx="5" sz="quarter"/>
+            <p:ph type="sldNum" sz="quarter" idx="5"/>
           </p:nvPr>
         </p:nvSpPr>
         <p:spPr/>
@@ -1135,7 +951,7 @@
 </file>
 
 <file path=ppt/notesSlides/notesSlide16.xml><?xml version="1.0" encoding="utf-8"?>
-<p:notes xmlns:a="http://schemas.openxmlformats.org/drawingml/2006/main" xmlns:p="http://schemas.openxmlformats.org/presentationml/2006/main" xmlns:r="http://schemas.openxmlformats.org/officeDocument/2006/relationships">
+<p:notes xmlns:a="http://schemas.openxmlformats.org/drawingml/2006/main" xmlns:r="http://schemas.openxmlformats.org/officeDocument/2006/relationships" xmlns:p="http://schemas.openxmlformats.org/presentationml/2006/main">
   <p:cSld>
     <p:spTree>
       <p:nvGrpSpPr>
@@ -1155,7 +971,7 @@
         <p:nvSpPr>
           <p:cNvPr id="2" name="Slide Image Placeholder 1"/>
           <p:cNvSpPr>
-            <a:spLocks noGrp="1"/>
+            <a:spLocks noGrp="1" noRot="1" noChangeAspect="1"/>
           </p:cNvSpPr>
           <p:nvPr>
             <p:ph type="sldImg" idx="2"/>
@@ -1170,7 +986,7 @@
             <a:spLocks noGrp="1"/>
           </p:cNvSpPr>
           <p:nvPr>
-            <p:ph type="body" idx="3" sz="quarter"/>
+            <p:ph type="body" sz="quarter" idx="3"/>
           </p:nvPr>
         </p:nvSpPr>
         <p:spPr/>
@@ -1192,13 +1008,17 @@
               <a:t>'Chatbots converse with you; Agentic AI accomplishes work for you.'</a:t>
             </a:r>
           </a:p>
-          <a:p/>
+          <a:p>
+            <a:endParaRPr/>
+          </a:p>
           <a:p>
             <a:r>
               <a:t>We are entering an exciting era where AI has hands and tools. For us as diploma computer engineers, learning to build and guide these agents will be the most valuable skill in our careers.</a:t>
             </a:r>
           </a:p>
-          <a:p/>
+          <a:p>
+            <a:endParaRPr/>
+          </a:p>
           <a:p>
             <a:r>
               <a:t>Thank you very much!'</a:t>
@@ -1213,7 +1033,7 @@
             <a:spLocks noGrp="1"/>
           </p:cNvSpPr>
           <p:nvPr>
-            <p:ph type="sldNum" idx="5" sz="quarter"/>
+            <p:ph type="sldNum" sz="quarter" idx="5"/>
           </p:nvPr>
         </p:nvSpPr>
         <p:spPr/>
@@ -1227,7 +1047,7 @@
 </file>
 
 <file path=ppt/notesSlides/notesSlide17.xml><?xml version="1.0" encoding="utf-8"?>
-<p:notes xmlns:a="http://schemas.openxmlformats.org/drawingml/2006/main" xmlns:p="http://schemas.openxmlformats.org/presentationml/2006/main" xmlns:r="http://schemas.openxmlformats.org/officeDocument/2006/relationships">
+<p:notes xmlns:a="http://schemas.openxmlformats.org/drawingml/2006/main" xmlns:r="http://schemas.openxmlformats.org/officeDocument/2006/relationships" xmlns:p="http://schemas.openxmlformats.org/presentationml/2006/main">
   <p:cSld>
     <p:spTree>
       <p:nvGrpSpPr>
@@ -1247,7 +1067,7 @@
         <p:nvSpPr>
           <p:cNvPr id="2" name="Slide Image Placeholder 1"/>
           <p:cNvSpPr>
-            <a:spLocks noGrp="1"/>
+            <a:spLocks noGrp="1" noRot="1" noChangeAspect="1"/>
           </p:cNvSpPr>
           <p:nvPr>
             <p:ph type="sldImg" idx="2"/>
@@ -1262,7 +1082,7 @@
             <a:spLocks noGrp="1"/>
           </p:cNvSpPr>
           <p:nvPr>
-            <p:ph type="body" idx="3" sz="quarter"/>
+            <p:ph type="body" sz="quarter" idx="3"/>
           </p:nvPr>
         </p:nvSpPr>
         <p:spPr/>
@@ -1279,7 +1099,9 @@
               <a:t>'Thank you respected teachers, guide, and my dear classmates for your time.</a:t>
             </a:r>
           </a:p>
-          <a:p/>
+          <a:p>
+            <a:endParaRPr/>
+          </a:p>
           <a:p>
             <a:r>
               <a:t>I have listed the main research and curriculum references on the left.</a:t>
@@ -1299,7 +1121,7 @@
             <a:spLocks noGrp="1"/>
           </p:cNvSpPr>
           <p:nvPr>
-            <p:ph type="sldNum" idx="5" sz="quarter"/>
+            <p:ph type="sldNum" sz="quarter" idx="5"/>
           </p:nvPr>
         </p:nvSpPr>
         <p:spPr/>
@@ -1313,7 +1135,7 @@
 </file>
 
 <file path=ppt/notesSlides/notesSlide2.xml><?xml version="1.0" encoding="utf-8"?>
-<p:notes xmlns:a="http://schemas.openxmlformats.org/drawingml/2006/main" xmlns:p="http://schemas.openxmlformats.org/presentationml/2006/main" xmlns:r="http://schemas.openxmlformats.org/officeDocument/2006/relationships">
+<p:notes xmlns:a="http://schemas.openxmlformats.org/drawingml/2006/main" xmlns:r="http://schemas.openxmlformats.org/officeDocument/2006/relationships" xmlns:p="http://schemas.openxmlformats.org/presentationml/2006/main">
   <p:cSld>
     <p:spTree>
       <p:nvGrpSpPr>
@@ -1333,7 +1155,7 @@
         <p:nvSpPr>
           <p:cNvPr id="2" name="Slide Image Placeholder 1"/>
           <p:cNvSpPr>
-            <a:spLocks noGrp="1"/>
+            <a:spLocks noGrp="1" noRot="1" noChangeAspect="1"/>
           </p:cNvSpPr>
           <p:nvPr>
             <p:ph type="sldImg" idx="2"/>
@@ -1348,7 +1170,7 @@
             <a:spLocks noGrp="1"/>
           </p:cNvSpPr>
           <p:nvPr>
-            <p:ph type="body" idx="3" sz="quarter"/>
+            <p:ph type="body" sz="quarter" idx="3"/>
           </p:nvPr>
         </p:nvSpPr>
         <p:spPr/>
@@ -1374,7 +1196,7 @@
             <a:spLocks noGrp="1"/>
           </p:cNvSpPr>
           <p:nvPr>
-            <p:ph type="sldNum" idx="5" sz="quarter"/>
+            <p:ph type="sldNum" sz="quarter" idx="5"/>
           </p:nvPr>
         </p:nvSpPr>
         <p:spPr/>
@@ -1388,7 +1210,7 @@
 </file>
 
 <file path=ppt/notesSlides/notesSlide3.xml><?xml version="1.0" encoding="utf-8"?>
-<p:notes xmlns:a="http://schemas.openxmlformats.org/drawingml/2006/main" xmlns:p="http://schemas.openxmlformats.org/presentationml/2006/main" xmlns:r="http://schemas.openxmlformats.org/officeDocument/2006/relationships">
+<p:notes xmlns:a="http://schemas.openxmlformats.org/drawingml/2006/main" xmlns:r="http://schemas.openxmlformats.org/officeDocument/2006/relationships" xmlns:p="http://schemas.openxmlformats.org/presentationml/2006/main">
   <p:cSld>
     <p:spTree>
       <p:nvGrpSpPr>
@@ -1408,7 +1230,7 @@
         <p:nvSpPr>
           <p:cNvPr id="2" name="Slide Image Placeholder 1"/>
           <p:cNvSpPr>
-            <a:spLocks noGrp="1"/>
+            <a:spLocks noGrp="1" noRot="1" noChangeAspect="1"/>
           </p:cNvSpPr>
           <p:nvPr>
             <p:ph type="sldImg" idx="2"/>
@@ -1423,7 +1245,7 @@
             <a:spLocks noGrp="1"/>
           </p:cNvSpPr>
           <p:nvPr>
-            <p:ph type="body" idx="3" sz="quarter"/>
+            <p:ph type="body" sz="quarter" idx="3"/>
           </p:nvPr>
         </p:nvSpPr>
         <p:spPr/>
@@ -1440,7 +1262,9 @@
               <a:t>'Let us start with a simple question: What is Agentic AI?</a:t>
             </a:r>
           </a:p>
-          <a:p/>
+          <a:p>
+            <a:endParaRPr/>
+          </a:p>
           <a:p>
             <a:r>
               <a:t>Think of it this way:</a:t>
@@ -1461,7 +1285,9 @@
               <a:t>Agentic AI stands up, picks up tools, and does the job for you!</a:t>
             </a:r>
           </a:p>
-          <a:p/>
+          <a:p>
+            <a:endParaRPr/>
+          </a:p>
           <a:p>
             <a:r>
               <a:t>For example, if you tell a chatbot: 'Book me a trip to Mumbai', it gives you a list of hotels.</a:t>
@@ -1481,7 +1307,7 @@
             <a:spLocks noGrp="1"/>
           </p:cNvSpPr>
           <p:nvPr>
-            <p:ph type="sldNum" idx="5" sz="quarter"/>
+            <p:ph type="sldNum" sz="quarter" idx="5"/>
           </p:nvPr>
         </p:nvSpPr>
         <p:spPr/>
@@ -1495,7 +1321,7 @@
 </file>
 
 <file path=ppt/notesSlides/notesSlide4.xml><?xml version="1.0" encoding="utf-8"?>
-<p:notes xmlns:a="http://schemas.openxmlformats.org/drawingml/2006/main" xmlns:p="http://schemas.openxmlformats.org/presentationml/2006/main" xmlns:r="http://schemas.openxmlformats.org/officeDocument/2006/relationships">
+<p:notes xmlns:a="http://schemas.openxmlformats.org/drawingml/2006/main" xmlns:r="http://schemas.openxmlformats.org/officeDocument/2006/relationships" xmlns:p="http://schemas.openxmlformats.org/presentationml/2006/main">
   <p:cSld>
     <p:spTree>
       <p:nvGrpSpPr>
@@ -1515,7 +1341,7 @@
         <p:nvSpPr>
           <p:cNvPr id="2" name="Slide Image Placeholder 1"/>
           <p:cNvSpPr>
-            <a:spLocks noGrp="1"/>
+            <a:spLocks noGrp="1" noRot="1" noChangeAspect="1"/>
           </p:cNvSpPr>
           <p:nvPr>
             <p:ph type="sldImg" idx="2"/>
@@ -1530,7 +1356,7 @@
             <a:spLocks noGrp="1"/>
           </p:cNvSpPr>
           <p:nvPr>
-            <p:ph type="body" idx="3" sz="quarter"/>
+            <p:ph type="body" sz="quarter" idx="3"/>
           </p:nvPr>
         </p:nvSpPr>
         <p:spPr/>
@@ -1547,7 +1373,9 @@
               <a:t>'How did we reach here? Let's look at the 4 steps of AI history:</a:t>
             </a:r>
           </a:p>
-          <a:p/>
+          <a:p>
+            <a:endParaRPr/>
+          </a:p>
           <a:p>
             <a:r>
               <a:t>1. In the 1960s, chatbots like ELIZA were just IF-ELSE rules. If you said 'I feel sad', it replied 'Why do you feel sad?'.</a:t>
@@ -1577,7 +1405,7 @@
             <a:spLocks noGrp="1"/>
           </p:cNvSpPr>
           <p:nvPr>
-            <p:ph type="sldNum" idx="5" sz="quarter"/>
+            <p:ph type="sldNum" sz="quarter" idx="5"/>
           </p:nvPr>
         </p:nvSpPr>
         <p:spPr/>
@@ -1591,7 +1419,7 @@
 </file>
 
 <file path=ppt/notesSlides/notesSlide5.xml><?xml version="1.0" encoding="utf-8"?>
-<p:notes xmlns:a="http://schemas.openxmlformats.org/drawingml/2006/main" xmlns:p="http://schemas.openxmlformats.org/presentationml/2006/main" xmlns:r="http://schemas.openxmlformats.org/officeDocument/2006/relationships">
+<p:notes xmlns:a="http://schemas.openxmlformats.org/drawingml/2006/main" xmlns:r="http://schemas.openxmlformats.org/officeDocument/2006/relationships" xmlns:p="http://schemas.openxmlformats.org/presentationml/2006/main">
   <p:cSld>
     <p:spTree>
       <p:nvGrpSpPr>
@@ -1611,7 +1439,7 @@
         <p:nvSpPr>
           <p:cNvPr id="2" name="Slide Image Placeholder 1"/>
           <p:cNvSpPr>
-            <a:spLocks noGrp="1"/>
+            <a:spLocks noGrp="1" noRot="1" noChangeAspect="1"/>
           </p:cNvSpPr>
           <p:nvPr>
             <p:ph type="sldImg" idx="2"/>
@@ -1626,7 +1454,7 @@
             <a:spLocks noGrp="1"/>
           </p:cNvSpPr>
           <p:nvPr>
-            <p:ph type="body" idx="3" sz="quarter"/>
+            <p:ph type="body" sz="quarter" idx="3"/>
           </p:nvPr>
         </p:nvSpPr>
         <p:spPr/>
@@ -1643,7 +1471,9 @@
               <a:t>'Why did we need to invent Agentic AI? Because of 4 big problems every programmer faces:</a:t>
             </a:r>
           </a:p>
-          <a:p/>
+          <a:p>
+            <a:endParaRPr/>
+          </a:p>
           <a:p>
             <a:r>
               <a:t>First, chatbots can't act. They write code, but you have to copy and paste it.</a:t>
@@ -1664,7 +1494,9 @@
               <a:t>And fourth, they hallucinate. They give you buggy code and don't even know it's broken!</a:t>
             </a:r>
           </a:p>
-          <a:p/>
+          <a:p>
+            <a:endParaRPr/>
+          </a:p>
           <a:p>
             <a:r>
               <a:t>Agentic AI was created to solve these exact problems by giving AI tools, memory, and the power to test its own code.'</a:t>
@@ -1679,7 +1511,7 @@
             <a:spLocks noGrp="1"/>
           </p:cNvSpPr>
           <p:nvPr>
-            <p:ph type="sldNum" idx="5" sz="quarter"/>
+            <p:ph type="sldNum" sz="quarter" idx="5"/>
           </p:nvPr>
         </p:nvSpPr>
         <p:spPr/>
@@ -1693,7 +1525,7 @@
 </file>
 
 <file path=ppt/notesSlides/notesSlide6.xml><?xml version="1.0" encoding="utf-8"?>
-<p:notes xmlns:a="http://schemas.openxmlformats.org/drawingml/2006/main" xmlns:p="http://schemas.openxmlformats.org/presentationml/2006/main" xmlns:r="http://schemas.openxmlformats.org/officeDocument/2006/relationships">
+<p:notes xmlns:a="http://schemas.openxmlformats.org/drawingml/2006/main" xmlns:r="http://schemas.openxmlformats.org/officeDocument/2006/relationships" xmlns:p="http://schemas.openxmlformats.org/presentationml/2006/main">
   <p:cSld>
     <p:spTree>
       <p:nvGrpSpPr>
@@ -1713,7 +1545,7 @@
         <p:nvSpPr>
           <p:cNvPr id="2" name="Slide Image Placeholder 1"/>
           <p:cNvSpPr>
-            <a:spLocks noGrp="1"/>
+            <a:spLocks noGrp="1" noRot="1" noChangeAspect="1"/>
           </p:cNvSpPr>
           <p:nvPr>
             <p:ph type="sldImg" idx="2"/>
@@ -1728,7 +1560,7 @@
             <a:spLocks noGrp="1"/>
           </p:cNvSpPr>
           <p:nvPr>
-            <p:ph type="body" idx="3" sz="quarter"/>
+            <p:ph type="body" sz="quarter" idx="3"/>
           </p:nvPr>
         </p:nvSpPr>
         <p:spPr/>
@@ -1745,7 +1577,9 @@
               <a:t>'Let's look at what makes up an AI Agent. You can compare it directly to a human worker:</a:t>
             </a:r>
           </a:p>
-          <a:p/>
+          <a:p>
+            <a:endParaRPr/>
+          </a:p>
           <a:p>
             <a:r>
               <a:t>1. The Brain: That's the Large Language Model. It does the thinking.</a:t>
@@ -1775,7 +1609,7 @@
             <a:spLocks noGrp="1"/>
           </p:cNvSpPr>
           <p:nvPr>
-            <p:ph type="sldNum" idx="5" sz="quarter"/>
+            <p:ph type="sldNum" sz="quarter" idx="5"/>
           </p:nvPr>
         </p:nvSpPr>
         <p:spPr/>
@@ -1789,7 +1623,7 @@
 </file>
 
 <file path=ppt/notesSlides/notesSlide7.xml><?xml version="1.0" encoding="utf-8"?>
-<p:notes xmlns:a="http://schemas.openxmlformats.org/drawingml/2006/main" xmlns:p="http://schemas.openxmlformats.org/presentationml/2006/main" xmlns:r="http://schemas.openxmlformats.org/officeDocument/2006/relationships">
+<p:notes xmlns:a="http://schemas.openxmlformats.org/drawingml/2006/main" xmlns:r="http://schemas.openxmlformats.org/officeDocument/2006/relationships" xmlns:p="http://schemas.openxmlformats.org/presentationml/2006/main">
   <p:cSld>
     <p:spTree>
       <p:nvGrpSpPr>
@@ -1809,7 +1643,7 @@
         <p:nvSpPr>
           <p:cNvPr id="2" name="Slide Image Placeholder 1"/>
           <p:cNvSpPr>
-            <a:spLocks noGrp="1"/>
+            <a:spLocks noGrp="1" noRot="1" noChangeAspect="1"/>
           </p:cNvSpPr>
           <p:nvPr>
             <p:ph type="sldImg" idx="2"/>
@@ -1824,7 +1658,7 @@
             <a:spLocks noGrp="1"/>
           </p:cNvSpPr>
           <p:nvPr>
-            <p:ph type="body" idx="3" sz="quarter"/>
+            <p:ph type="body" sz="quarter" idx="3"/>
           </p:nvPr>
         </p:nvSpPr>
         <p:spPr/>
@@ -1841,7 +1675,9 @@
               <a:t>'Now let's answer how an agent works. It uses a cycle called ReAct: Reasoning plus Acting.</a:t>
             </a:r>
           </a:p>
-          <a:p/>
+          <a:p>
+            <a:endParaRPr/>
+          </a:p>
           <a:p>
             <a:r>
               <a:t>Here is the simple step-by-step:</a:t>
@@ -1872,7 +1708,9 @@
               <a:t>5. It REFLECTS, fixes its own code, and repeats the cycle until everything works.</a:t>
             </a:r>
           </a:p>
-          <a:p/>
+          <a:p>
+            <a:endParaRPr/>
+          </a:p>
           <a:p>
             <a:r>
               <a:t>This self-correcting feedback loop is the true superpower of Agentic AI.'</a:t>
@@ -1887,7 +1725,7 @@
             <a:spLocks noGrp="1"/>
           </p:cNvSpPr>
           <p:nvPr>
-            <p:ph type="sldNum" idx="5" sz="quarter"/>
+            <p:ph type="sldNum" sz="quarter" idx="5"/>
           </p:nvPr>
         </p:nvSpPr>
         <p:spPr/>
@@ -1901,7 +1739,7 @@
 </file>
 
 <file path=ppt/notesSlides/notesSlide8.xml><?xml version="1.0" encoding="utf-8"?>
-<p:notes xmlns:a="http://schemas.openxmlformats.org/drawingml/2006/main" xmlns:p="http://schemas.openxmlformats.org/presentationml/2006/main" xmlns:r="http://schemas.openxmlformats.org/officeDocument/2006/relationships">
+<p:notes xmlns:a="http://schemas.openxmlformats.org/drawingml/2006/main" xmlns:r="http://schemas.openxmlformats.org/officeDocument/2006/relationships" xmlns:p="http://schemas.openxmlformats.org/presentationml/2006/main">
   <p:cSld>
     <p:spTree>
       <p:nvGrpSpPr>
@@ -1921,7 +1759,7 @@
         <p:nvSpPr>
           <p:cNvPr id="2" name="Slide Image Placeholder 1"/>
           <p:cNvSpPr>
-            <a:spLocks noGrp="1"/>
+            <a:spLocks noGrp="1" noRot="1" noChangeAspect="1"/>
           </p:cNvSpPr>
           <p:nvPr>
             <p:ph type="sldImg" idx="2"/>
@@ -1936,7 +1774,7 @@
             <a:spLocks noGrp="1"/>
           </p:cNvSpPr>
           <p:nvPr>
-            <p:ph type="body" idx="3" sz="quarter"/>
+            <p:ph type="body" sz="quarter" idx="3"/>
           </p:nvPr>
         </p:nvSpPr>
         <p:spPr/>
@@ -1953,7 +1791,9 @@
               <a:t>'What software and tools are used to build AI agents? We use 4 simple layers:</a:t>
             </a:r>
           </a:p>
-          <a:p/>
+          <a:p>
+            <a:endParaRPr/>
+          </a:p>
           <a:p>
             <a:r>
               <a:t>1. Foundation Models: Models like GPT-4 or Gemini act as the brain.</a:t>
@@ -1983,7 +1823,7 @@
             <a:spLocks noGrp="1"/>
           </p:cNvSpPr>
           <p:nvPr>
-            <p:ph type="sldNum" idx="5" sz="quarter"/>
+            <p:ph type="sldNum" sz="quarter" idx="5"/>
           </p:nvPr>
         </p:nvSpPr>
         <p:spPr/>
@@ -1997,7 +1837,7 @@
 </file>
 
 <file path=ppt/notesSlides/notesSlide9.xml><?xml version="1.0" encoding="utf-8"?>
-<p:notes xmlns:a="http://schemas.openxmlformats.org/drawingml/2006/main" xmlns:p="http://schemas.openxmlformats.org/presentationml/2006/main" xmlns:r="http://schemas.openxmlformats.org/officeDocument/2006/relationships">
+<p:notes xmlns:a="http://schemas.openxmlformats.org/drawingml/2006/main" xmlns:r="http://schemas.openxmlformats.org/officeDocument/2006/relationships" xmlns:p="http://schemas.openxmlformats.org/presentationml/2006/main">
   <p:cSld>
     <p:spTree>
       <p:nvGrpSpPr>
@@ -2017,7 +1857,7 @@
         <p:nvSpPr>
           <p:cNvPr id="2" name="Slide Image Placeholder 1"/>
           <p:cNvSpPr>
-            <a:spLocks noGrp="1"/>
+            <a:spLocks noGrp="1" noRot="1" noChangeAspect="1"/>
           </p:cNvSpPr>
           <p:nvPr>
             <p:ph type="sldImg" idx="2"/>
@@ -2032,7 +1872,7 @@
             <a:spLocks noGrp="1"/>
           </p:cNvSpPr>
           <p:nvPr>
-            <p:ph type="body" idx="3" sz="quarter"/>
+            <p:ph type="body" sz="quarter" idx="3"/>
           </p:nvPr>
         </p:nvSpPr>
         <p:spPr/>
@@ -2049,7 +1889,9 @@
               <a:t>'Where is Agentic AI being used in industry today? Here are four major fields:</a:t>
             </a:r>
           </a:p>
-          <a:p/>
+          <a:p>
+            <a:endParaRPr/>
+          </a:p>
           <a:p>
             <a:r>
               <a:t>1. In Software Engineering: Companies use agents to automatically find bugs and write unit tests.</a:t>
@@ -2079,7 +1921,7 @@
             <a:spLocks noGrp="1"/>
           </p:cNvSpPr>
           <p:nvPr>
-            <p:ph type="sldNum" idx="5" sz="quarter"/>
+            <p:ph type="sldNum" sz="quarter" idx="5"/>
           </p:nvPr>
         </p:nvSpPr>
         <p:spPr/>
@@ -2130,10 +1972,9 @@
           <a:lstStyle/>
           <a:p>
             <a:r>
-              <a:rPr lang="en-US" smtClean="0"/>
+              <a:rPr lang="en-US"/>
               <a:t>Click to edit Master title style</a:t>
             </a:r>
-            <a:endParaRPr lang="en-US"/>
           </a:p>
         </p:txBody>
       </p:sp>
@@ -2249,10 +2090,9 @@
           </a:lstStyle>
           <a:p>
             <a:r>
-              <a:rPr lang="en-US" smtClean="0"/>
+              <a:rPr lang="en-US"/>
               <a:t>Click to edit Master subtitle style</a:t>
             </a:r>
-            <a:endParaRPr lang="en-US"/>
           </a:p>
         </p:txBody>
       </p:sp>
@@ -2273,7 +2113,7 @@
           <a:p>
             <a:fld id="{5BCAD085-E8A6-8845-BD4E-CB4CCA059FC4}" type="datetimeFigureOut">
               <a:rPr lang="en-US" smtClean="0"/>
-              <a:t>1/27/13</a:t>
+              <a:t>9/29/2026</a:t>
             </a:fld>
             <a:endParaRPr lang="en-US"/>
           </a:p>
@@ -2367,10 +2207,9 @@
           <a:lstStyle/>
           <a:p>
             <a:r>
-              <a:rPr lang="en-US" smtClean="0"/>
+              <a:rPr lang="en-US"/>
               <a:t>Click to edit Master title style</a:t>
             </a:r>
-            <a:endParaRPr lang="en-US"/>
           </a:p>
         </p:txBody>
       </p:sp>
@@ -2391,38 +2230,37 @@
           <a:p>
             <a:pPr lvl="0"/>
             <a:r>
-              <a:rPr lang="en-US" smtClean="0"/>
+              <a:rPr lang="en-US"/>
               <a:t>Click to edit Master text styles</a:t>
             </a:r>
           </a:p>
           <a:p>
             <a:pPr lvl="1"/>
             <a:r>
-              <a:rPr lang="en-US" smtClean="0"/>
+              <a:rPr lang="en-US"/>
               <a:t>Second level</a:t>
             </a:r>
           </a:p>
           <a:p>
             <a:pPr lvl="2"/>
             <a:r>
-              <a:rPr lang="en-US" smtClean="0"/>
+              <a:rPr lang="en-US"/>
               <a:t>Third level</a:t>
             </a:r>
           </a:p>
           <a:p>
             <a:pPr lvl="3"/>
             <a:r>
-              <a:rPr lang="en-US" smtClean="0"/>
+              <a:rPr lang="en-US"/>
               <a:t>Fourth level</a:t>
             </a:r>
           </a:p>
           <a:p>
             <a:pPr lvl="4"/>
             <a:r>
-              <a:rPr lang="en-US" smtClean="0"/>
+              <a:rPr lang="en-US"/>
               <a:t>Fifth level</a:t>
             </a:r>
-            <a:endParaRPr lang="en-US"/>
           </a:p>
         </p:txBody>
       </p:sp>
@@ -2443,7 +2281,7 @@
           <a:p>
             <a:fld id="{5BCAD085-E8A6-8845-BD4E-CB4CCA059FC4}" type="datetimeFigureOut">
               <a:rPr lang="en-US" smtClean="0"/>
-              <a:t>1/27/13</a:t>
+              <a:t>9/29/2026</a:t>
             </a:fld>
             <a:endParaRPr lang="en-US"/>
           </a:p>
@@ -2542,10 +2380,9 @@
           <a:lstStyle/>
           <a:p>
             <a:r>
-              <a:rPr lang="en-US" smtClean="0"/>
+              <a:rPr lang="en-US"/>
               <a:t>Click to edit Master title style</a:t>
             </a:r>
-            <a:endParaRPr lang="en-US"/>
           </a:p>
         </p:txBody>
       </p:sp>
@@ -2571,38 +2408,37 @@
           <a:p>
             <a:pPr lvl="0"/>
             <a:r>
-              <a:rPr lang="en-US" smtClean="0"/>
+              <a:rPr lang="en-US"/>
               <a:t>Click to edit Master text styles</a:t>
             </a:r>
           </a:p>
           <a:p>
             <a:pPr lvl="1"/>
             <a:r>
-              <a:rPr lang="en-US" smtClean="0"/>
+              <a:rPr lang="en-US"/>
               <a:t>Second level</a:t>
             </a:r>
           </a:p>
           <a:p>
             <a:pPr lvl="2"/>
             <a:r>
-              <a:rPr lang="en-US" smtClean="0"/>
+              <a:rPr lang="en-US"/>
               <a:t>Third level</a:t>
             </a:r>
           </a:p>
           <a:p>
             <a:pPr lvl="3"/>
             <a:r>
-              <a:rPr lang="en-US" smtClean="0"/>
+              <a:rPr lang="en-US"/>
               <a:t>Fourth level</a:t>
             </a:r>
           </a:p>
           <a:p>
             <a:pPr lvl="4"/>
             <a:r>
-              <a:rPr lang="en-US" smtClean="0"/>
+              <a:rPr lang="en-US"/>
               <a:t>Fifth level</a:t>
             </a:r>
-            <a:endParaRPr lang="en-US"/>
           </a:p>
         </p:txBody>
       </p:sp>
@@ -2623,7 +2459,7 @@
           <a:p>
             <a:fld id="{5BCAD085-E8A6-8845-BD4E-CB4CCA059FC4}" type="datetimeFigureOut">
               <a:rPr lang="en-US" smtClean="0"/>
-              <a:t>1/27/13</a:t>
+              <a:t>9/29/2026</a:t>
             </a:fld>
             <a:endParaRPr lang="en-US"/>
           </a:p>
@@ -2717,10 +2553,9 @@
           <a:lstStyle/>
           <a:p>
             <a:r>
-              <a:rPr lang="en-US" smtClean="0"/>
+              <a:rPr lang="en-US"/>
               <a:t>Click to edit Master title style</a:t>
             </a:r>
-            <a:endParaRPr lang="en-US"/>
           </a:p>
         </p:txBody>
       </p:sp>
@@ -2741,38 +2576,37 @@
           <a:p>
             <a:pPr lvl="0"/>
             <a:r>
-              <a:rPr lang="en-US" smtClean="0"/>
+              <a:rPr lang="en-US"/>
               <a:t>Click to edit Master text styles</a:t>
             </a:r>
           </a:p>
           <a:p>
             <a:pPr lvl="1"/>
             <a:r>
-              <a:rPr lang="en-US" smtClean="0"/>
+              <a:rPr lang="en-US"/>
               <a:t>Second level</a:t>
             </a:r>
           </a:p>
           <a:p>
             <a:pPr lvl="2"/>
             <a:r>
-              <a:rPr lang="en-US" smtClean="0"/>
+              <a:rPr lang="en-US"/>
               <a:t>Third level</a:t>
             </a:r>
           </a:p>
           <a:p>
             <a:pPr lvl="3"/>
             <a:r>
-              <a:rPr lang="en-US" smtClean="0"/>
+              <a:rPr lang="en-US"/>
               <a:t>Fourth level</a:t>
             </a:r>
           </a:p>
           <a:p>
             <a:pPr lvl="4"/>
             <a:r>
-              <a:rPr lang="en-US" smtClean="0"/>
+              <a:rPr lang="en-US"/>
               <a:t>Fifth level</a:t>
             </a:r>
-            <a:endParaRPr lang="en-US"/>
           </a:p>
         </p:txBody>
       </p:sp>
@@ -2793,7 +2627,7 @@
           <a:p>
             <a:fld id="{5BCAD085-E8A6-8845-BD4E-CB4CCA059FC4}" type="datetimeFigureOut">
               <a:rPr lang="en-US" smtClean="0"/>
-              <a:t>1/27/13</a:t>
+              <a:t>9/29/2026</a:t>
             </a:fld>
             <a:endParaRPr lang="en-US"/>
           </a:p>
@@ -2896,10 +2730,9 @@
           </a:lstStyle>
           <a:p>
             <a:r>
-              <a:rPr lang="en-US" smtClean="0"/>
+              <a:rPr lang="en-US"/>
               <a:t>Click to edit Master title style</a:t>
             </a:r>
-            <a:endParaRPr lang="en-US"/>
           </a:p>
         </p:txBody>
       </p:sp>
@@ -3016,7 +2849,7 @@
           <a:p>
             <a:pPr lvl="0"/>
             <a:r>
-              <a:rPr lang="en-US" smtClean="0"/>
+              <a:rPr lang="en-US"/>
               <a:t>Click to edit Master text styles</a:t>
             </a:r>
           </a:p>
@@ -3039,7 +2872,7 @@
           <a:p>
             <a:fld id="{5BCAD085-E8A6-8845-BD4E-CB4CCA059FC4}" type="datetimeFigureOut">
               <a:rPr lang="en-US" smtClean="0"/>
-              <a:t>1/27/13</a:t>
+              <a:t>9/29/2026</a:t>
             </a:fld>
             <a:endParaRPr lang="en-US"/>
           </a:p>
@@ -3133,10 +2966,9 @@
           <a:lstStyle/>
           <a:p>
             <a:r>
-              <a:rPr lang="en-US" smtClean="0"/>
+              <a:rPr lang="en-US"/>
               <a:t>Click to edit Master title style</a:t>
             </a:r>
-            <a:endParaRPr lang="en-US"/>
           </a:p>
         </p:txBody>
       </p:sp>
@@ -3190,38 +3022,37 @@
           <a:p>
             <a:pPr lvl="0"/>
             <a:r>
-              <a:rPr lang="en-US" smtClean="0"/>
+              <a:rPr lang="en-US"/>
               <a:t>Click to edit Master text styles</a:t>
             </a:r>
           </a:p>
           <a:p>
             <a:pPr lvl="1"/>
             <a:r>
-              <a:rPr lang="en-US" smtClean="0"/>
+              <a:rPr lang="en-US"/>
               <a:t>Second level</a:t>
             </a:r>
           </a:p>
           <a:p>
             <a:pPr lvl="2"/>
             <a:r>
-              <a:rPr lang="en-US" smtClean="0"/>
+              <a:rPr lang="en-US"/>
               <a:t>Third level</a:t>
             </a:r>
           </a:p>
           <a:p>
             <a:pPr lvl="3"/>
             <a:r>
-              <a:rPr lang="en-US" smtClean="0"/>
+              <a:rPr lang="en-US"/>
               <a:t>Fourth level</a:t>
             </a:r>
           </a:p>
           <a:p>
             <a:pPr lvl="4"/>
             <a:r>
-              <a:rPr lang="en-US" smtClean="0"/>
+              <a:rPr lang="en-US"/>
               <a:t>Fifth level</a:t>
             </a:r>
-            <a:endParaRPr lang="en-US"/>
           </a:p>
         </p:txBody>
       </p:sp>
@@ -3275,38 +3106,37 @@
           <a:p>
             <a:pPr lvl="0"/>
             <a:r>
-              <a:rPr lang="en-US" smtClean="0"/>
+              <a:rPr lang="en-US"/>
               <a:t>Click to edit Master text styles</a:t>
             </a:r>
           </a:p>
           <a:p>
             <a:pPr lvl="1"/>
             <a:r>
-              <a:rPr lang="en-US" smtClean="0"/>
+              <a:rPr lang="en-US"/>
               <a:t>Second level</a:t>
             </a:r>
           </a:p>
           <a:p>
             <a:pPr lvl="2"/>
             <a:r>
-              <a:rPr lang="en-US" smtClean="0"/>
+              <a:rPr lang="en-US"/>
               <a:t>Third level</a:t>
             </a:r>
           </a:p>
           <a:p>
             <a:pPr lvl="3"/>
             <a:r>
-              <a:rPr lang="en-US" smtClean="0"/>
+              <a:rPr lang="en-US"/>
               <a:t>Fourth level</a:t>
             </a:r>
           </a:p>
           <a:p>
             <a:pPr lvl="4"/>
             <a:r>
-              <a:rPr lang="en-US" smtClean="0"/>
+              <a:rPr lang="en-US"/>
               <a:t>Fifth level</a:t>
             </a:r>
-            <a:endParaRPr lang="en-US"/>
           </a:p>
         </p:txBody>
       </p:sp>
@@ -3327,7 +3157,7 @@
           <a:p>
             <a:fld id="{5BCAD085-E8A6-8845-BD4E-CB4CCA059FC4}" type="datetimeFigureOut">
               <a:rPr lang="en-US" smtClean="0"/>
-              <a:t>1/27/13</a:t>
+              <a:t>9/29/2026</a:t>
             </a:fld>
             <a:endParaRPr lang="en-US"/>
           </a:p>
@@ -3425,10 +3255,9 @@
           </a:lstStyle>
           <a:p>
             <a:r>
-              <a:rPr lang="en-US" smtClean="0"/>
+              <a:rPr lang="en-US"/>
               <a:t>Click to edit Master title style</a:t>
             </a:r>
-            <a:endParaRPr lang="en-US"/>
           </a:p>
         </p:txBody>
       </p:sp>
@@ -3491,7 +3320,7 @@
           <a:p>
             <a:pPr lvl="0"/>
             <a:r>
-              <a:rPr lang="en-US" smtClean="0"/>
+              <a:rPr lang="en-US"/>
               <a:t>Click to edit Master text styles</a:t>
             </a:r>
           </a:p>
@@ -3547,38 +3376,37 @@
           <a:p>
             <a:pPr lvl="0"/>
             <a:r>
-              <a:rPr lang="en-US" smtClean="0"/>
+              <a:rPr lang="en-US"/>
               <a:t>Click to edit Master text styles</a:t>
             </a:r>
           </a:p>
           <a:p>
             <a:pPr lvl="1"/>
             <a:r>
-              <a:rPr lang="en-US" smtClean="0"/>
+              <a:rPr lang="en-US"/>
               <a:t>Second level</a:t>
             </a:r>
           </a:p>
           <a:p>
             <a:pPr lvl="2"/>
             <a:r>
-              <a:rPr lang="en-US" smtClean="0"/>
+              <a:rPr lang="en-US"/>
               <a:t>Third level</a:t>
             </a:r>
           </a:p>
           <a:p>
             <a:pPr lvl="3"/>
             <a:r>
-              <a:rPr lang="en-US" smtClean="0"/>
+              <a:rPr lang="en-US"/>
               <a:t>Fourth level</a:t>
             </a:r>
           </a:p>
           <a:p>
             <a:pPr lvl="4"/>
             <a:r>
-              <a:rPr lang="en-US" smtClean="0"/>
+              <a:rPr lang="en-US"/>
               <a:t>Fifth level</a:t>
             </a:r>
-            <a:endParaRPr lang="en-US"/>
           </a:p>
         </p:txBody>
       </p:sp>
@@ -3641,7 +3469,7 @@
           <a:p>
             <a:pPr lvl="0"/>
             <a:r>
-              <a:rPr lang="en-US" smtClean="0"/>
+              <a:rPr lang="en-US"/>
               <a:t>Click to edit Master text styles</a:t>
             </a:r>
           </a:p>
@@ -3697,38 +3525,37 @@
           <a:p>
             <a:pPr lvl="0"/>
             <a:r>
-              <a:rPr lang="en-US" smtClean="0"/>
+              <a:rPr lang="en-US"/>
               <a:t>Click to edit Master text styles</a:t>
             </a:r>
           </a:p>
           <a:p>
             <a:pPr lvl="1"/>
             <a:r>
-              <a:rPr lang="en-US" smtClean="0"/>
+              <a:rPr lang="en-US"/>
               <a:t>Second level</a:t>
             </a:r>
           </a:p>
           <a:p>
             <a:pPr lvl="2"/>
             <a:r>
-              <a:rPr lang="en-US" smtClean="0"/>
+              <a:rPr lang="en-US"/>
               <a:t>Third level</a:t>
             </a:r>
           </a:p>
           <a:p>
             <a:pPr lvl="3"/>
             <a:r>
-              <a:rPr lang="en-US" smtClean="0"/>
+              <a:rPr lang="en-US"/>
               <a:t>Fourth level</a:t>
             </a:r>
           </a:p>
           <a:p>
             <a:pPr lvl="4"/>
             <a:r>
-              <a:rPr lang="en-US" smtClean="0"/>
+              <a:rPr lang="en-US"/>
               <a:t>Fifth level</a:t>
             </a:r>
-            <a:endParaRPr lang="en-US"/>
           </a:p>
         </p:txBody>
       </p:sp>
@@ -3749,7 +3576,7 @@
           <a:p>
             <a:fld id="{5BCAD085-E8A6-8845-BD4E-CB4CCA059FC4}" type="datetimeFigureOut">
               <a:rPr lang="en-US" smtClean="0"/>
-              <a:t>1/27/13</a:t>
+              <a:t>9/29/2026</a:t>
             </a:fld>
             <a:endParaRPr lang="en-US"/>
           </a:p>
@@ -3843,10 +3670,9 @@
           <a:lstStyle/>
           <a:p>
             <a:r>
-              <a:rPr lang="en-US" smtClean="0"/>
+              <a:rPr lang="en-US"/>
               <a:t>Click to edit Master title style</a:t>
             </a:r>
-            <a:endParaRPr lang="en-US"/>
           </a:p>
         </p:txBody>
       </p:sp>
@@ -3867,7 +3693,7 @@
           <a:p>
             <a:fld id="{5BCAD085-E8A6-8845-BD4E-CB4CCA059FC4}" type="datetimeFigureOut">
               <a:rPr lang="en-US" smtClean="0"/>
-              <a:t>1/27/13</a:t>
+              <a:t>9/29/2026</a:t>
             </a:fld>
             <a:endParaRPr lang="en-US"/>
           </a:p>
@@ -3962,7 +3788,7 @@
           <a:p>
             <a:fld id="{5BCAD085-E8A6-8845-BD4E-CB4CCA059FC4}" type="datetimeFigureOut">
               <a:rPr lang="en-US" smtClean="0"/>
-              <a:t>1/27/13</a:t>
+              <a:t>9/29/2026</a:t>
             </a:fld>
             <a:endParaRPr lang="en-US"/>
           </a:p>
@@ -4065,10 +3891,9 @@
           </a:lstStyle>
           <a:p>
             <a:r>
-              <a:rPr lang="en-US" smtClean="0"/>
+              <a:rPr lang="en-US"/>
               <a:t>Click to edit Master title style</a:t>
             </a:r>
-            <a:endParaRPr lang="en-US"/>
           </a:p>
         </p:txBody>
       </p:sp>
@@ -4122,38 +3947,37 @@
           <a:p>
             <a:pPr lvl="0"/>
             <a:r>
-              <a:rPr lang="en-US" smtClean="0"/>
+              <a:rPr lang="en-US"/>
               <a:t>Click to edit Master text styles</a:t>
             </a:r>
           </a:p>
           <a:p>
             <a:pPr lvl="1"/>
             <a:r>
-              <a:rPr lang="en-US" smtClean="0"/>
+              <a:rPr lang="en-US"/>
               <a:t>Second level</a:t>
             </a:r>
           </a:p>
           <a:p>
             <a:pPr lvl="2"/>
             <a:r>
-              <a:rPr lang="en-US" smtClean="0"/>
+              <a:rPr lang="en-US"/>
               <a:t>Third level</a:t>
             </a:r>
           </a:p>
           <a:p>
             <a:pPr lvl="3"/>
             <a:r>
-              <a:rPr lang="en-US" smtClean="0"/>
+              <a:rPr lang="en-US"/>
               <a:t>Fourth level</a:t>
             </a:r>
           </a:p>
           <a:p>
             <a:pPr lvl="4"/>
             <a:r>
-              <a:rPr lang="en-US" smtClean="0"/>
+              <a:rPr lang="en-US"/>
               <a:t>Fifth level</a:t>
             </a:r>
-            <a:endParaRPr lang="en-US"/>
           </a:p>
         </p:txBody>
       </p:sp>
@@ -4216,7 +4040,7 @@
           <a:p>
             <a:pPr lvl="0"/>
             <a:r>
-              <a:rPr lang="en-US" smtClean="0"/>
+              <a:rPr lang="en-US"/>
               <a:t>Click to edit Master text styles</a:t>
             </a:r>
           </a:p>
@@ -4239,7 +4063,7 @@
           <a:p>
             <a:fld id="{5BCAD085-E8A6-8845-BD4E-CB4CCA059FC4}" type="datetimeFigureOut">
               <a:rPr lang="en-US" smtClean="0"/>
-              <a:t>1/27/13</a:t>
+              <a:t>9/29/2026</a:t>
             </a:fld>
             <a:endParaRPr lang="en-US"/>
           </a:p>
@@ -4342,10 +4166,9 @@
           </a:lstStyle>
           <a:p>
             <a:r>
-              <a:rPr lang="en-US" smtClean="0"/>
+              <a:rPr lang="en-US"/>
               <a:t>Click to edit Master title style</a:t>
             </a:r>
-            <a:endParaRPr lang="en-US"/>
           </a:p>
         </p:txBody>
       </p:sp>
@@ -4469,7 +4292,7 @@
           <a:p>
             <a:pPr lvl="0"/>
             <a:r>
-              <a:rPr lang="en-US" smtClean="0"/>
+              <a:rPr lang="en-US"/>
               <a:t>Click to edit Master text styles</a:t>
             </a:r>
           </a:p>
@@ -4492,7 +4315,7 @@
           <a:p>
             <a:fld id="{5BCAD085-E8A6-8845-BD4E-CB4CCA059FC4}" type="datetimeFigureOut">
               <a:rPr lang="en-US" smtClean="0"/>
-              <a:t>1/27/13</a:t>
+              <a:t>9/29/2026</a:t>
             </a:fld>
             <a:endParaRPr lang="en-US"/>
           </a:p>
@@ -4601,10 +4424,9 @@
           <a:lstStyle/>
           <a:p>
             <a:r>
-              <a:rPr lang="en-US" smtClean="0"/>
+              <a:rPr lang="en-US"/>
               <a:t>Click to edit Master title style</a:t>
             </a:r>
-            <a:endParaRPr lang="en-US"/>
           </a:p>
         </p:txBody>
       </p:sp>
@@ -4635,38 +4457,37 @@
           <a:p>
             <a:pPr lvl="0"/>
             <a:r>
-              <a:rPr lang="en-US" smtClean="0"/>
+              <a:rPr lang="en-US"/>
               <a:t>Click to edit Master text styles</a:t>
             </a:r>
           </a:p>
           <a:p>
             <a:pPr lvl="1"/>
             <a:r>
-              <a:rPr lang="en-US" smtClean="0"/>
+              <a:rPr lang="en-US"/>
               <a:t>Second level</a:t>
             </a:r>
           </a:p>
           <a:p>
             <a:pPr lvl="2"/>
             <a:r>
-              <a:rPr lang="en-US" smtClean="0"/>
+              <a:rPr lang="en-US"/>
               <a:t>Third level</a:t>
             </a:r>
           </a:p>
           <a:p>
             <a:pPr lvl="3"/>
             <a:r>
-              <a:rPr lang="en-US" smtClean="0"/>
+              <a:rPr lang="en-US"/>
               <a:t>Fourth level</a:t>
             </a:r>
           </a:p>
           <a:p>
             <a:pPr lvl="4"/>
             <a:r>
-              <a:rPr lang="en-US" smtClean="0"/>
+              <a:rPr lang="en-US"/>
               <a:t>Fifth level</a:t>
             </a:r>
-            <a:endParaRPr lang="en-US"/>
           </a:p>
         </p:txBody>
       </p:sp>
@@ -4705,7 +4526,7 @@
           <a:p>
             <a:fld id="{5BCAD085-E8A6-8845-BD4E-CB4CCA059FC4}" type="datetimeFigureOut">
               <a:rPr lang="en-US" smtClean="0"/>
-              <a:t>1/27/13</a:t>
+              <a:t>9/29/2026</a:t>
             </a:fld>
             <a:endParaRPr lang="en-US"/>
           </a:p>
@@ -5064,7 +4885,7 @@
 </file>
 
 <file path=ppt/slides/slide1.xml><?xml version="1.0" encoding="utf-8"?>
-<p:sld xmlns:a="http://schemas.openxmlformats.org/drawingml/2006/main" xmlns:p="http://schemas.openxmlformats.org/presentationml/2006/main" xmlns:r="http://schemas.openxmlformats.org/officeDocument/2006/relationships">
+<p:sld xmlns:a="http://schemas.openxmlformats.org/drawingml/2006/main" xmlns:r="http://schemas.openxmlformats.org/officeDocument/2006/relationships" xmlns:p="http://schemas.openxmlformats.org/presentationml/2006/main">
   <p:cSld>
     <p:spTree>
       <p:nvGrpSpPr>
@@ -5072,7 +4893,14 @@
         <p:cNvGrpSpPr/>
         <p:nvPr/>
       </p:nvGrpSpPr>
-      <p:grpSpPr/>
+      <p:grpSpPr>
+        <a:xfrm>
+          <a:off x="0" y="0"/>
+          <a:ext cx="0" cy="0"/>
+          <a:chOff x="0" y="0"/>
+          <a:chExt cx="0" cy="0"/>
+        </a:xfrm>
+      </p:grpSpPr>
       <p:sp>
         <p:nvSpPr>
           <p:cNvPr id="2" name="Rectangle 1"/>
@@ -5113,6 +4941,7 @@
           <a:lstStyle/>
           <a:p>
             <a:pPr algn="ctr"/>
+            <a:endParaRPr/>
           </a:p>
         </p:txBody>
       </p:sp>
@@ -5156,6 +4985,7 @@
           <a:lstStyle/>
           <a:p>
             <a:pPr algn="ctr"/>
+            <a:endParaRPr/>
           </a:p>
         </p:txBody>
       </p:sp>
@@ -5317,7 +5147,7 @@
           </a:fontRef>
         </p:style>
         <p:txBody>
-          <a:bodyPr rtlCol="0" anchor="ctr" wrap="square" lIns="365760" tIns="228600"/>
+          <a:bodyPr wrap="square" lIns="365760" tIns="228600" rtlCol="0" anchor="ctr"/>
           <a:lstStyle/>
           <a:p>
             <a:pPr algn="ctr">
@@ -5391,7 +5221,7 @@
 </file>
 
 <file path=ppt/slides/slide10.xml><?xml version="1.0" encoding="utf-8"?>
-<p:sld xmlns:a="http://schemas.openxmlformats.org/drawingml/2006/main" xmlns:p="http://schemas.openxmlformats.org/presentationml/2006/main" xmlns:r="http://schemas.openxmlformats.org/officeDocument/2006/relationships">
+<p:sld xmlns:a="http://schemas.openxmlformats.org/drawingml/2006/main" xmlns:r="http://schemas.openxmlformats.org/officeDocument/2006/relationships" xmlns:p="http://schemas.openxmlformats.org/presentationml/2006/main">
   <p:cSld>
     <p:spTree>
       <p:nvGrpSpPr>
@@ -5399,7 +5229,14 @@
         <p:cNvGrpSpPr/>
         <p:nvPr/>
       </p:nvGrpSpPr>
-      <p:grpSpPr/>
+      <p:grpSpPr>
+        <a:xfrm>
+          <a:off x="0" y="0"/>
+          <a:ext cx="0" cy="0"/>
+          <a:chOff x="0" y="0"/>
+          <a:chExt cx="0" cy="0"/>
+        </a:xfrm>
+      </p:grpSpPr>
       <p:sp>
         <p:nvSpPr>
           <p:cNvPr id="2" name="Rectangle 1"/>
@@ -5436,7 +5273,7 @@
           </a:fontRef>
         </p:style>
         <p:txBody>
-          <a:bodyPr rtlCol="0" anchor="ctr" wrap="square" lIns="731520" tIns="164592"/>
+          <a:bodyPr wrap="square" lIns="731520" tIns="164592" rtlCol="0" anchor="ctr"/>
           <a:lstStyle/>
           <a:p>
             <a:pPr algn="ctr">
@@ -5506,6 +5343,7 @@
           <a:lstStyle/>
           <a:p>
             <a:pPr algn="ctr"/>
+            <a:endParaRPr/>
           </a:p>
         </p:txBody>
       </p:sp>
@@ -5583,11 +5421,11 @@
           </a:fontRef>
         </p:style>
         <p:txBody>
-          <a:bodyPr rtlCol="0" anchor="ctr" wrap="square" lIns="320040" tIns="274320"/>
+          <a:bodyPr wrap="square" lIns="320040" tIns="274320" rtlCol="0" anchor="ctr"/>
           <a:lstStyle/>
           <a:p>
             <a:pPr algn="ctr">
-              <a:defRPr b="1" sz="1600">
+              <a:defRPr sz="1600" b="1">
                 <a:solidFill>
                   <a:srgbClr val="1E3A8A"/>
                 </a:solidFill>
@@ -5602,7 +5440,7 @@
               <a:spcBef>
                 <a:spcPts val="800"/>
               </a:spcBef>
-              <a:defRPr b="1" sz="1300">
+              <a:defRPr sz="1300" b="1">
                 <a:solidFill>
                   <a:srgbClr val="0F172A"/>
                 </a:solidFill>
@@ -5629,7 +5467,7 @@
               <a:spcBef>
                 <a:spcPts val="800"/>
               </a:spcBef>
-              <a:defRPr b="1" sz="1300">
+              <a:defRPr sz="1300" b="1">
                 <a:solidFill>
                   <a:srgbClr val="0F172A"/>
                 </a:solidFill>
@@ -5754,11 +5592,11 @@
           </a:fontRef>
         </p:style>
         <p:txBody>
-          <a:bodyPr rtlCol="0" anchor="ctr" wrap="square" lIns="320040" tIns="274320"/>
+          <a:bodyPr wrap="square" lIns="320040" tIns="274320" rtlCol="0" anchor="ctr"/>
           <a:lstStyle/>
           <a:p>
             <a:pPr algn="ctr">
-              <a:defRPr b="1" sz="1500">
+              <a:defRPr sz="1500" b="1">
                 <a:solidFill>
                   <a:srgbClr val="0EA5E9"/>
                 </a:solidFill>
@@ -5773,7 +5611,7 @@
               <a:spcBef>
                 <a:spcPts val="1000"/>
               </a:spcBef>
-              <a:defRPr b="1" sz="1300">
+              <a:defRPr sz="1300" b="1">
                 <a:solidFill>
                   <a:srgbClr val="FFFFFF"/>
                 </a:solidFill>
@@ -5800,7 +5638,7 @@
               <a:spcBef>
                 <a:spcPts val="1000"/>
               </a:spcBef>
-              <a:defRPr b="1" sz="1300">
+              <a:defRPr sz="1300" b="1">
                 <a:solidFill>
                   <a:srgbClr val="FFFFFF"/>
                 </a:solidFill>
@@ -5827,7 +5665,7 @@
               <a:spcBef>
                 <a:spcPts val="1000"/>
               </a:spcBef>
-              <a:defRPr b="1" sz="1300">
+              <a:defRPr sz="1300" b="1">
                 <a:solidFill>
                   <a:srgbClr val="FFFFFF"/>
                 </a:solidFill>
@@ -5854,7 +5692,7 @@
               <a:spcBef>
                 <a:spcPts val="1000"/>
               </a:spcBef>
-              <a:defRPr b="1" sz="1300">
+              <a:defRPr sz="1300" b="1">
                 <a:solidFill>
                   <a:srgbClr val="FFFFFF"/>
                 </a:solidFill>
@@ -5887,7 +5725,7 @@
 </file>
 
 <file path=ppt/slides/slide11.xml><?xml version="1.0" encoding="utf-8"?>
-<p:sld xmlns:a="http://schemas.openxmlformats.org/drawingml/2006/main" xmlns:p="http://schemas.openxmlformats.org/presentationml/2006/main" xmlns:r="http://schemas.openxmlformats.org/officeDocument/2006/relationships">
+<p:sld xmlns:a="http://schemas.openxmlformats.org/drawingml/2006/main" xmlns:r="http://schemas.openxmlformats.org/officeDocument/2006/relationships" xmlns:p="http://schemas.openxmlformats.org/presentationml/2006/main">
   <p:cSld>
     <p:spTree>
       <p:nvGrpSpPr>
@@ -5895,7 +5733,14 @@
         <p:cNvGrpSpPr/>
         <p:nvPr/>
       </p:nvGrpSpPr>
-      <p:grpSpPr/>
+      <p:grpSpPr>
+        <a:xfrm>
+          <a:off x="0" y="0"/>
+          <a:ext cx="0" cy="0"/>
+          <a:chOff x="0" y="0"/>
+          <a:chExt cx="0" cy="0"/>
+        </a:xfrm>
+      </p:grpSpPr>
       <p:sp>
         <p:nvSpPr>
           <p:cNvPr id="2" name="Rectangle 1"/>
@@ -5932,7 +5777,7 @@
           </a:fontRef>
         </p:style>
         <p:txBody>
-          <a:bodyPr rtlCol="0" anchor="ctr" wrap="square" lIns="731520" tIns="164592"/>
+          <a:bodyPr wrap="square" lIns="731520" tIns="164592" rtlCol="0" anchor="ctr"/>
           <a:lstStyle/>
           <a:p>
             <a:pPr algn="ctr">
@@ -6002,6 +5847,7 @@
           <a:lstStyle/>
           <a:p>
             <a:pPr algn="ctr"/>
+            <a:endParaRPr/>
           </a:p>
         </p:txBody>
       </p:sp>
@@ -6079,11 +5925,11 @@
           </a:fontRef>
         </p:style>
         <p:txBody>
-          <a:bodyPr rtlCol="0" anchor="ctr" wrap="square" lIns="228600" tIns="182880"/>
+          <a:bodyPr wrap="square" lIns="228600" tIns="182880" rtlCol="0" anchor="ctr"/>
           <a:lstStyle/>
           <a:p>
             <a:pPr algn="ctr">
-              <a:defRPr b="1" sz="950">
+              <a:defRPr sz="950" b="1">
                 <a:solidFill>
                   <a:srgbClr val="0D9488"/>
                 </a:solidFill>
@@ -6098,7 +5944,7 @@
               <a:spcBef>
                 <a:spcPts val="300"/>
               </a:spcBef>
-              <a:defRPr b="1" sz="1350">
+              <a:defRPr sz="1350" b="1">
                 <a:solidFill>
                   <a:srgbClr val="0F172A"/>
                 </a:solidFill>
@@ -6163,11 +6009,11 @@
           </a:fontRef>
         </p:style>
         <p:txBody>
-          <a:bodyPr rtlCol="0" anchor="ctr" wrap="square" lIns="228600" tIns="182880"/>
+          <a:bodyPr wrap="square" lIns="228600" tIns="182880" rtlCol="0" anchor="ctr"/>
           <a:lstStyle/>
           <a:p>
             <a:pPr algn="ctr">
-              <a:defRPr b="1" sz="950">
+              <a:defRPr sz="950" b="1">
                 <a:solidFill>
                   <a:srgbClr val="0D9488"/>
                 </a:solidFill>
@@ -6182,7 +6028,7 @@
               <a:spcBef>
                 <a:spcPts val="300"/>
               </a:spcBef>
-              <a:defRPr b="1" sz="1350">
+              <a:defRPr sz="1350" b="1">
                 <a:solidFill>
                   <a:srgbClr val="0F172A"/>
                 </a:solidFill>
@@ -6247,11 +6093,11 @@
           </a:fontRef>
         </p:style>
         <p:txBody>
-          <a:bodyPr rtlCol="0" anchor="ctr" wrap="square" lIns="228600" tIns="182880"/>
+          <a:bodyPr wrap="square" lIns="228600" tIns="182880" rtlCol="0" anchor="ctr"/>
           <a:lstStyle/>
           <a:p>
             <a:pPr algn="ctr">
-              <a:defRPr b="1" sz="950">
+              <a:defRPr sz="950" b="1">
                 <a:solidFill>
                   <a:srgbClr val="0D9488"/>
                 </a:solidFill>
@@ -6266,7 +6112,7 @@
               <a:spcBef>
                 <a:spcPts val="300"/>
               </a:spcBef>
-              <a:defRPr b="1" sz="1350">
+              <a:defRPr sz="1350" b="1">
                 <a:solidFill>
                   <a:srgbClr val="0F172A"/>
                 </a:solidFill>
@@ -6331,11 +6177,11 @@
           </a:fontRef>
         </p:style>
         <p:txBody>
-          <a:bodyPr rtlCol="0" anchor="ctr" wrap="square" lIns="228600" tIns="182880"/>
+          <a:bodyPr wrap="square" lIns="228600" tIns="182880" rtlCol="0" anchor="ctr"/>
           <a:lstStyle/>
           <a:p>
             <a:pPr algn="ctr">
-              <a:defRPr b="1" sz="950">
+              <a:defRPr sz="950" b="1">
                 <a:solidFill>
                   <a:srgbClr val="0D9488"/>
                 </a:solidFill>
@@ -6350,7 +6196,7 @@
               <a:spcBef>
                 <a:spcPts val="300"/>
               </a:spcBef>
-              <a:defRPr b="1" sz="1350">
+              <a:defRPr sz="1350" b="1">
                 <a:solidFill>
                   <a:srgbClr val="0F172A"/>
                 </a:solidFill>
@@ -6415,11 +6261,11 @@
           </a:fontRef>
         </p:style>
         <p:txBody>
-          <a:bodyPr rtlCol="0" anchor="ctr" wrap="square" lIns="228600" tIns="182880"/>
+          <a:bodyPr wrap="square" lIns="228600" tIns="182880" rtlCol="0" anchor="ctr"/>
           <a:lstStyle/>
           <a:p>
             <a:pPr algn="ctr">
-              <a:defRPr b="1" sz="950">
+              <a:defRPr sz="950" b="1">
                 <a:solidFill>
                   <a:srgbClr val="0D9488"/>
                 </a:solidFill>
@@ -6434,7 +6280,7 @@
               <a:spcBef>
                 <a:spcPts val="300"/>
               </a:spcBef>
-              <a:defRPr b="1" sz="1350">
+              <a:defRPr sz="1350" b="1">
                 <a:solidFill>
                   <a:srgbClr val="0F172A"/>
                 </a:solidFill>
@@ -6499,11 +6345,11 @@
           </a:fontRef>
         </p:style>
         <p:txBody>
-          <a:bodyPr rtlCol="0" anchor="ctr" wrap="square" lIns="228600" tIns="182880"/>
+          <a:bodyPr wrap="square" lIns="228600" tIns="182880" rtlCol="0" anchor="ctr"/>
           <a:lstStyle/>
           <a:p>
             <a:pPr algn="ctr">
-              <a:defRPr b="1" sz="950">
+              <a:defRPr sz="950" b="1">
                 <a:solidFill>
                   <a:srgbClr val="0D9488"/>
                 </a:solidFill>
@@ -6518,7 +6364,7 @@
               <a:spcBef>
                 <a:spcPts val="300"/>
               </a:spcBef>
-              <a:defRPr b="1" sz="1350">
+              <a:defRPr sz="1350" b="1">
                 <a:solidFill>
                   <a:srgbClr val="0F172A"/>
                 </a:solidFill>
@@ -6554,7 +6400,7 @@
 </file>
 
 <file path=ppt/slides/slide12.xml><?xml version="1.0" encoding="utf-8"?>
-<p:sld xmlns:a="http://schemas.openxmlformats.org/drawingml/2006/main" xmlns:p="http://schemas.openxmlformats.org/presentationml/2006/main" xmlns:r="http://schemas.openxmlformats.org/officeDocument/2006/relationships">
+<p:sld xmlns:a="http://schemas.openxmlformats.org/drawingml/2006/main" xmlns:r="http://schemas.openxmlformats.org/officeDocument/2006/relationships" xmlns:p="http://schemas.openxmlformats.org/presentationml/2006/main">
   <p:cSld>
     <p:spTree>
       <p:nvGrpSpPr>
@@ -6562,7 +6408,14 @@
         <p:cNvGrpSpPr/>
         <p:nvPr/>
       </p:nvGrpSpPr>
-      <p:grpSpPr/>
+      <p:grpSpPr>
+        <a:xfrm>
+          <a:off x="0" y="0"/>
+          <a:ext cx="0" cy="0"/>
+          <a:chOff x="0" y="0"/>
+          <a:chExt cx="0" cy="0"/>
+        </a:xfrm>
+      </p:grpSpPr>
       <p:sp>
         <p:nvSpPr>
           <p:cNvPr id="2" name="Rectangle 1"/>
@@ -6599,7 +6452,7 @@
           </a:fontRef>
         </p:style>
         <p:txBody>
-          <a:bodyPr rtlCol="0" anchor="ctr" wrap="square" lIns="731520" tIns="164592"/>
+          <a:bodyPr wrap="square" lIns="731520" tIns="164592" rtlCol="0" anchor="ctr"/>
           <a:lstStyle/>
           <a:p>
             <a:pPr algn="ctr">
@@ -6669,6 +6522,7 @@
           <a:lstStyle/>
           <a:p>
             <a:pPr algn="ctr"/>
+            <a:endParaRPr/>
           </a:p>
         </p:txBody>
       </p:sp>
@@ -6746,11 +6600,11 @@
           </a:fontRef>
         </p:style>
         <p:txBody>
-          <a:bodyPr rtlCol="0" anchor="ctr" wrap="square" lIns="274320" tIns="109728"/>
+          <a:bodyPr wrap="square" lIns="274320" tIns="109728" rtlCol="0" anchor="ctr"/>
           <a:lstStyle/>
           <a:p>
             <a:pPr algn="ctr">
-              <a:defRPr b="1" sz="1350">
+              <a:defRPr sz="1350" b="1">
                 <a:solidFill>
                   <a:srgbClr val="B91C1C"/>
                 </a:solidFill>
@@ -6760,7 +6614,7 @@
               <a:t>1. Compounding Errors  </a:t>
             </a:r>
             <a:r>
-              <a:rPr b="1" sz="1000">
+              <a:rPr sz="1000" b="1">
                 <a:solidFill>
                   <a:srgbClr val="475569"/>
                 </a:solidFill>
@@ -6823,11 +6677,11 @@
           </a:fontRef>
         </p:style>
         <p:txBody>
-          <a:bodyPr rtlCol="0" anchor="ctr" wrap="square" lIns="274320" tIns="109728"/>
+          <a:bodyPr wrap="square" lIns="274320" tIns="109728" rtlCol="0" anchor="ctr"/>
           <a:lstStyle/>
           <a:p>
             <a:pPr algn="ctr">
-              <a:defRPr b="1" sz="1350">
+              <a:defRPr sz="1350" b="1">
                 <a:solidFill>
                   <a:srgbClr val="B91C1C"/>
                 </a:solidFill>
@@ -6837,7 +6691,7 @@
               <a:t>2. Security &amp; Prompt Injection  </a:t>
             </a:r>
             <a:r>
-              <a:rPr b="1" sz="1000">
+              <a:rPr sz="1000" b="1">
                 <a:solidFill>
                   <a:srgbClr val="475569"/>
                 </a:solidFill>
@@ -6900,11 +6754,11 @@
           </a:fontRef>
         </p:style>
         <p:txBody>
-          <a:bodyPr rtlCol="0" anchor="ctr" wrap="square" lIns="274320" tIns="109728"/>
+          <a:bodyPr wrap="square" lIns="274320" tIns="109728" rtlCol="0" anchor="ctr"/>
           <a:lstStyle/>
           <a:p>
             <a:pPr algn="ctr">
-              <a:defRPr b="1" sz="1350">
+              <a:defRPr sz="1350" b="1">
                 <a:solidFill>
                   <a:srgbClr val="B91C1C"/>
                 </a:solidFill>
@@ -6914,7 +6768,7 @@
               <a:t>3. High API Costs &amp; Speed  </a:t>
             </a:r>
             <a:r>
-              <a:rPr b="1" sz="1000">
+              <a:rPr sz="1000" b="1">
                 <a:solidFill>
                   <a:srgbClr val="475569"/>
                 </a:solidFill>
@@ -6977,11 +6831,11 @@
           </a:fontRef>
         </p:style>
         <p:txBody>
-          <a:bodyPr rtlCol="0" anchor="ctr" wrap="square" lIns="274320" tIns="109728"/>
+          <a:bodyPr wrap="square" lIns="274320" tIns="109728" rtlCol="0" anchor="ctr"/>
           <a:lstStyle/>
           <a:p>
             <a:pPr algn="ctr">
-              <a:defRPr b="1" sz="1350">
+              <a:defRPr sz="1350" b="1">
                 <a:solidFill>
                   <a:srgbClr val="B91C1C"/>
                 </a:solidFill>
@@ -6991,7 +6845,7 @@
               <a:t>4. Getting Stuck in Infinite Loops  </a:t>
             </a:r>
             <a:r>
-              <a:rPr b="1" sz="1000">
+              <a:rPr sz="1000" b="1">
                 <a:solidFill>
                   <a:srgbClr val="475569"/>
                 </a:solidFill>
@@ -7054,11 +6908,11 @@
           </a:fontRef>
         </p:style>
         <p:txBody>
-          <a:bodyPr rtlCol="0" anchor="ctr" wrap="square" lIns="274320" tIns="109728"/>
+          <a:bodyPr wrap="square" lIns="274320" tIns="109728" rtlCol="0" anchor="ctr"/>
           <a:lstStyle/>
           <a:p>
             <a:pPr algn="ctr">
-              <a:defRPr b="1" sz="1350">
+              <a:defRPr sz="1350" b="1">
                 <a:solidFill>
                   <a:srgbClr val="B91C1C"/>
                 </a:solidFill>
@@ -7068,7 +6922,7 @@
               <a:t>5. Lack of Responsibility &amp; Ethics  </a:t>
             </a:r>
             <a:r>
-              <a:rPr b="1" sz="1000">
+              <a:rPr sz="1000" b="1">
                 <a:solidFill>
                   <a:srgbClr val="475569"/>
                 </a:solidFill>
@@ -7102,7 +6956,7 @@
 </file>
 
 <file path=ppt/slides/slide13.xml><?xml version="1.0" encoding="utf-8"?>
-<p:sld xmlns:a="http://schemas.openxmlformats.org/drawingml/2006/main" xmlns:p="http://schemas.openxmlformats.org/presentationml/2006/main" xmlns:r="http://schemas.openxmlformats.org/officeDocument/2006/relationships">
+<p:sld xmlns:a="http://schemas.openxmlformats.org/drawingml/2006/main" xmlns:r="http://schemas.openxmlformats.org/officeDocument/2006/relationships" xmlns:p="http://schemas.openxmlformats.org/presentationml/2006/main">
   <p:cSld>
     <p:spTree>
       <p:nvGrpSpPr>
@@ -7110,7 +6964,14 @@
         <p:cNvGrpSpPr/>
         <p:nvPr/>
       </p:nvGrpSpPr>
-      <p:grpSpPr/>
+      <p:grpSpPr>
+        <a:xfrm>
+          <a:off x="0" y="0"/>
+          <a:ext cx="0" cy="0"/>
+          <a:chOff x="0" y="0"/>
+          <a:chExt cx="0" cy="0"/>
+        </a:xfrm>
+      </p:grpSpPr>
       <p:sp>
         <p:nvSpPr>
           <p:cNvPr id="2" name="Rectangle 1"/>
@@ -7147,7 +7008,7 @@
           </a:fontRef>
         </p:style>
         <p:txBody>
-          <a:bodyPr rtlCol="0" anchor="ctr" wrap="square" lIns="731520" tIns="164592"/>
+          <a:bodyPr wrap="square" lIns="731520" tIns="164592" rtlCol="0" anchor="ctr"/>
           <a:lstStyle/>
           <a:p>
             <a:pPr algn="ctr">
@@ -7159,6 +7020,7 @@
               </a:defRPr>
             </a:pPr>
             <a:r>
+              <a:rPr dirty="0"/>
               <a:t>DIPLOMA COMPUTER ENGINEERING SEMINAR</a:t>
             </a:r>
           </a:p>
@@ -7172,7 +7034,8 @@
               </a:defRPr>
             </a:pPr>
             <a:r>
-              <a:t>Industry Expected Outcomes (MSBTE 9-Point Matrix)</a:t>
+              <a:rPr dirty="0"/>
+              <a:t>Industry Expected Outcomes</a:t>
             </a:r>
           </a:p>
         </p:txBody>
@@ -7217,6 +7080,7 @@
           <a:lstStyle/>
           <a:p>
             <a:pPr algn="ctr"/>
+            <a:endParaRPr/>
           </a:p>
         </p:txBody>
       </p:sp>
@@ -7294,11 +7158,11 @@
           </a:fontRef>
         </p:style>
         <p:txBody>
-          <a:bodyPr rtlCol="0" anchor="ctr" wrap="square" lIns="182880" tIns="137160"/>
+          <a:bodyPr wrap="square" lIns="182880" tIns="137160" rtlCol="0" anchor="ctr"/>
           <a:lstStyle/>
           <a:p>
             <a:pPr algn="ctr">
-              <a:defRPr b="1" sz="1350">
+              <a:defRPr sz="1350" b="1">
                 <a:solidFill>
                   <a:srgbClr val="1E3A8A"/>
                 </a:solidFill>
@@ -7363,11 +7227,11 @@
           </a:fontRef>
         </p:style>
         <p:txBody>
-          <a:bodyPr rtlCol="0" anchor="ctr" wrap="square" lIns="182880" tIns="137160"/>
+          <a:bodyPr wrap="square" lIns="182880" tIns="137160" rtlCol="0" anchor="ctr"/>
           <a:lstStyle/>
           <a:p>
             <a:pPr algn="ctr">
-              <a:defRPr b="1" sz="1350">
+              <a:defRPr sz="1350" b="1">
                 <a:solidFill>
                   <a:srgbClr val="1E3A8A"/>
                 </a:solidFill>
@@ -7432,11 +7296,11 @@
           </a:fontRef>
         </p:style>
         <p:txBody>
-          <a:bodyPr rtlCol="0" anchor="ctr" wrap="square" lIns="182880" tIns="137160"/>
+          <a:bodyPr wrap="square" lIns="182880" tIns="137160" rtlCol="0" anchor="ctr"/>
           <a:lstStyle/>
           <a:p>
             <a:pPr algn="ctr">
-              <a:defRPr b="1" sz="1350">
+              <a:defRPr sz="1350" b="1">
                 <a:solidFill>
                   <a:srgbClr val="1E3A8A"/>
                 </a:solidFill>
@@ -7501,11 +7365,11 @@
           </a:fontRef>
         </p:style>
         <p:txBody>
-          <a:bodyPr rtlCol="0" anchor="ctr" wrap="square" lIns="182880" tIns="137160"/>
+          <a:bodyPr wrap="square" lIns="182880" tIns="137160" rtlCol="0" anchor="ctr"/>
           <a:lstStyle/>
           <a:p>
             <a:pPr algn="ctr">
-              <a:defRPr b="1" sz="1350">
+              <a:defRPr sz="1350" b="1">
                 <a:solidFill>
                   <a:srgbClr val="1E3A8A"/>
                 </a:solidFill>
@@ -7570,11 +7434,11 @@
           </a:fontRef>
         </p:style>
         <p:txBody>
-          <a:bodyPr rtlCol="0" anchor="ctr" wrap="square" lIns="182880" tIns="137160"/>
+          <a:bodyPr wrap="square" lIns="182880" tIns="137160" rtlCol="0" anchor="ctr"/>
           <a:lstStyle/>
           <a:p>
             <a:pPr algn="ctr">
-              <a:defRPr b="1" sz="1350">
+              <a:defRPr sz="1350" b="1">
                 <a:solidFill>
                   <a:srgbClr val="1E3A8A"/>
                 </a:solidFill>
@@ -7639,11 +7503,11 @@
           </a:fontRef>
         </p:style>
         <p:txBody>
-          <a:bodyPr rtlCol="0" anchor="ctr" wrap="square" lIns="182880" tIns="137160"/>
+          <a:bodyPr wrap="square" lIns="182880" tIns="137160" rtlCol="0" anchor="ctr"/>
           <a:lstStyle/>
           <a:p>
             <a:pPr algn="ctr">
-              <a:defRPr b="1" sz="1350">
+              <a:defRPr sz="1350" b="1">
                 <a:solidFill>
                   <a:srgbClr val="1E3A8A"/>
                 </a:solidFill>
@@ -7708,11 +7572,11 @@
           </a:fontRef>
         </p:style>
         <p:txBody>
-          <a:bodyPr rtlCol="0" anchor="ctr" wrap="square" lIns="182880" tIns="137160"/>
+          <a:bodyPr wrap="square" lIns="182880" tIns="137160" rtlCol="0" anchor="ctr"/>
           <a:lstStyle/>
           <a:p>
             <a:pPr algn="ctr">
-              <a:defRPr b="1" sz="1350">
+              <a:defRPr sz="1350" b="1">
                 <a:solidFill>
                   <a:srgbClr val="1E3A8A"/>
                 </a:solidFill>
@@ -7777,11 +7641,11 @@
           </a:fontRef>
         </p:style>
         <p:txBody>
-          <a:bodyPr rtlCol="0" anchor="ctr" wrap="square" lIns="182880" tIns="137160"/>
+          <a:bodyPr wrap="square" lIns="182880" tIns="137160" rtlCol="0" anchor="ctr"/>
           <a:lstStyle/>
           <a:p>
             <a:pPr algn="ctr">
-              <a:defRPr b="1" sz="1350">
+              <a:defRPr sz="1350" b="1">
                 <a:solidFill>
                   <a:srgbClr val="1E3A8A"/>
                 </a:solidFill>
@@ -7846,11 +7710,11 @@
           </a:fontRef>
         </p:style>
         <p:txBody>
-          <a:bodyPr rtlCol="0" anchor="ctr" wrap="square" lIns="182880" tIns="137160"/>
+          <a:bodyPr wrap="square" lIns="182880" tIns="137160" rtlCol="0" anchor="ctr"/>
           <a:lstStyle/>
           <a:p>
             <a:pPr algn="ctr">
-              <a:defRPr b="1" sz="1350">
+              <a:defRPr sz="1350" b="1">
                 <a:solidFill>
                   <a:srgbClr val="1E3A8A"/>
                 </a:solidFill>
@@ -7886,7 +7750,7 @@
 </file>
 
 <file path=ppt/slides/slide14.xml><?xml version="1.0" encoding="utf-8"?>
-<p:sld xmlns:a="http://schemas.openxmlformats.org/drawingml/2006/main" xmlns:p="http://schemas.openxmlformats.org/presentationml/2006/main" xmlns:r="http://schemas.openxmlformats.org/officeDocument/2006/relationships">
+<p:sld xmlns:a="http://schemas.openxmlformats.org/drawingml/2006/main" xmlns:r="http://schemas.openxmlformats.org/officeDocument/2006/relationships" xmlns:p="http://schemas.openxmlformats.org/presentationml/2006/main">
   <p:cSld>
     <p:spTree>
       <p:nvGrpSpPr>
@@ -7894,7 +7758,14 @@
         <p:cNvGrpSpPr/>
         <p:nvPr/>
       </p:nvGrpSpPr>
-      <p:grpSpPr/>
+      <p:grpSpPr>
+        <a:xfrm>
+          <a:off x="0" y="0"/>
+          <a:ext cx="0" cy="0"/>
+          <a:chOff x="0" y="0"/>
+          <a:chExt cx="0" cy="0"/>
+        </a:xfrm>
+      </p:grpSpPr>
       <p:sp>
         <p:nvSpPr>
           <p:cNvPr id="2" name="Rectangle 1"/>
@@ -7931,7 +7802,7 @@
           </a:fontRef>
         </p:style>
         <p:txBody>
-          <a:bodyPr rtlCol="0" anchor="ctr" wrap="square" lIns="731520" tIns="164592"/>
+          <a:bodyPr wrap="square" lIns="731520" tIns="164592" rtlCol="0" anchor="ctr"/>
           <a:lstStyle/>
           <a:p>
             <a:pPr algn="ctr">
@@ -8001,6 +7872,7 @@
           <a:lstStyle/>
           <a:p>
             <a:pPr algn="ctr"/>
+            <a:endParaRPr/>
           </a:p>
         </p:txBody>
       </p:sp>
@@ -8078,11 +7950,11 @@
           </a:fontRef>
         </p:style>
         <p:txBody>
-          <a:bodyPr rtlCol="0" anchor="ctr" wrap="square" lIns="320040" tIns="274320"/>
+          <a:bodyPr wrap="square" lIns="320040" tIns="274320" rtlCol="0" anchor="ctr"/>
           <a:lstStyle/>
           <a:p>
             <a:pPr algn="ctr">
-              <a:defRPr b="1" sz="1500">
+              <a:defRPr sz="1500" b="1">
                 <a:solidFill>
                   <a:srgbClr val="1E3A8A"/>
                 </a:solidFill>
@@ -8097,7 +7969,7 @@
               <a:spcBef>
                 <a:spcPts val="800"/>
               </a:spcBef>
-              <a:defRPr b="1" sz="1200">
+              <a:defRPr sz="1200" b="1">
                 <a:solidFill>
                   <a:srgbClr val="0F172A"/>
                 </a:solidFill>
@@ -8120,7 +7992,7 @@
               <a:spcBef>
                 <a:spcPts val="800"/>
               </a:spcBef>
-              <a:defRPr b="1" sz="1200">
+              <a:defRPr sz="1200" b="1">
                 <a:solidFill>
                   <a:srgbClr val="0F172A"/>
                 </a:solidFill>
@@ -8143,7 +8015,7 @@
               <a:spcBef>
                 <a:spcPts val="800"/>
               </a:spcBef>
-              <a:defRPr b="1" sz="1200">
+              <a:defRPr sz="1200" b="1">
                 <a:solidFill>
                   <a:srgbClr val="0F172A"/>
                 </a:solidFill>
@@ -8166,7 +8038,7 @@
               <a:spcBef>
                 <a:spcPts val="800"/>
               </a:spcBef>
-              <a:defRPr b="1" sz="1200">
+              <a:defRPr sz="1200" b="1">
                 <a:solidFill>
                   <a:srgbClr val="0F172A"/>
                 </a:solidFill>
@@ -8189,7 +8061,7 @@
               <a:spcBef>
                 <a:spcPts val="800"/>
               </a:spcBef>
-              <a:defRPr b="1" sz="1200">
+              <a:defRPr sz="1200" b="1">
                 <a:solidFill>
                   <a:srgbClr val="0F172A"/>
                 </a:solidFill>
@@ -8247,11 +8119,11 @@
           </a:fontRef>
         </p:style>
         <p:txBody>
-          <a:bodyPr rtlCol="0" anchor="ctr" wrap="square" lIns="320040" tIns="274320"/>
+          <a:bodyPr wrap="square" lIns="320040" tIns="274320" rtlCol="0" anchor="ctr"/>
           <a:lstStyle/>
           <a:p>
             <a:pPr algn="ctr">
-              <a:defRPr b="1" sz="1500">
+              <a:defRPr sz="1500" b="1">
                 <a:solidFill>
                   <a:srgbClr val="0D9488"/>
                 </a:solidFill>
@@ -8266,7 +8138,7 @@
               <a:spcBef>
                 <a:spcPts val="800"/>
               </a:spcBef>
-              <a:defRPr b="1" sz="1200">
+              <a:defRPr sz="1200" b="1">
                 <a:solidFill>
                   <a:srgbClr val="1E3A8A"/>
                 </a:solidFill>
@@ -8289,7 +8161,7 @@
               <a:spcBef>
                 <a:spcPts val="800"/>
               </a:spcBef>
-              <a:defRPr b="1" sz="1200">
+              <a:defRPr sz="1200" b="1">
                 <a:solidFill>
                   <a:srgbClr val="1E3A8A"/>
                 </a:solidFill>
@@ -8312,7 +8184,7 @@
               <a:spcBef>
                 <a:spcPts val="800"/>
               </a:spcBef>
-              <a:defRPr b="1" sz="1200">
+              <a:defRPr sz="1200" b="1">
                 <a:solidFill>
                   <a:srgbClr val="1E3A8A"/>
                 </a:solidFill>
@@ -8335,7 +8207,7 @@
               <a:spcBef>
                 <a:spcPts val="800"/>
               </a:spcBef>
-              <a:defRPr b="1" sz="1200">
+              <a:defRPr sz="1200" b="1">
                 <a:solidFill>
                   <a:srgbClr val="1E3A8A"/>
                 </a:solidFill>
@@ -8358,7 +8230,7 @@
               <a:spcBef>
                 <a:spcPts val="800"/>
               </a:spcBef>
-              <a:defRPr b="1" sz="1200">
+              <a:defRPr sz="1200" b="1">
                 <a:solidFill>
                   <a:srgbClr val="1E3A8A"/>
                 </a:solidFill>
@@ -8387,7 +8259,7 @@
 </file>
 
 <file path=ppt/slides/slide15.xml><?xml version="1.0" encoding="utf-8"?>
-<p:sld xmlns:a="http://schemas.openxmlformats.org/drawingml/2006/main" xmlns:p="http://schemas.openxmlformats.org/presentationml/2006/main" xmlns:r="http://schemas.openxmlformats.org/officeDocument/2006/relationships">
+<p:sld xmlns:a="http://schemas.openxmlformats.org/drawingml/2006/main" xmlns:r="http://schemas.openxmlformats.org/officeDocument/2006/relationships" xmlns:p="http://schemas.openxmlformats.org/presentationml/2006/main">
   <p:cSld>
     <p:spTree>
       <p:nvGrpSpPr>
@@ -8395,7 +8267,14 @@
         <p:cNvGrpSpPr/>
         <p:nvPr/>
       </p:nvGrpSpPr>
-      <p:grpSpPr/>
+      <p:grpSpPr>
+        <a:xfrm>
+          <a:off x="0" y="0"/>
+          <a:ext cx="0" cy="0"/>
+          <a:chOff x="0" y="0"/>
+          <a:chExt cx="0" cy="0"/>
+        </a:xfrm>
+      </p:grpSpPr>
       <p:sp>
         <p:nvSpPr>
           <p:cNvPr id="2" name="Rectangle 1"/>
@@ -8432,7 +8311,7 @@
           </a:fontRef>
         </p:style>
         <p:txBody>
-          <a:bodyPr rtlCol="0" anchor="ctr" wrap="square" lIns="731520" tIns="164592"/>
+          <a:bodyPr wrap="square" lIns="731520" tIns="164592" rtlCol="0" anchor="ctr"/>
           <a:lstStyle/>
           <a:p>
             <a:pPr algn="ctr">
@@ -8502,6 +8381,7 @@
           <a:lstStyle/>
           <a:p>
             <a:pPr algn="ctr"/>
+            <a:endParaRPr/>
           </a:p>
         </p:txBody>
       </p:sp>
@@ -8579,11 +8459,11 @@
           </a:fontRef>
         </p:style>
         <p:txBody>
-          <a:bodyPr rtlCol="0" anchor="ctr" wrap="square" lIns="274320" tIns="182880"/>
+          <a:bodyPr wrap="square" lIns="274320" tIns="182880" rtlCol="0" anchor="ctr"/>
           <a:lstStyle/>
           <a:p>
             <a:pPr algn="ctr">
-              <a:defRPr b="1" sz="950">
+              <a:defRPr sz="950" b="1">
                 <a:solidFill>
                   <a:srgbClr val="0EA5E9"/>
                 </a:solidFill>
@@ -8598,7 +8478,7 @@
               <a:spcBef>
                 <a:spcPts val="300"/>
               </a:spcBef>
-              <a:defRPr b="1" sz="1400">
+              <a:defRPr sz="1400" b="1">
                 <a:solidFill>
                   <a:srgbClr val="0F172A"/>
                 </a:solidFill>
@@ -8663,11 +8543,11 @@
           </a:fontRef>
         </p:style>
         <p:txBody>
-          <a:bodyPr rtlCol="0" anchor="ctr" wrap="square" lIns="274320" tIns="182880"/>
+          <a:bodyPr wrap="square" lIns="274320" tIns="182880" rtlCol="0" anchor="ctr"/>
           <a:lstStyle/>
           <a:p>
             <a:pPr algn="ctr">
-              <a:defRPr b="1" sz="950">
+              <a:defRPr sz="950" b="1">
                 <a:solidFill>
                   <a:srgbClr val="0EA5E9"/>
                 </a:solidFill>
@@ -8682,7 +8562,7 @@
               <a:spcBef>
                 <a:spcPts val="300"/>
               </a:spcBef>
-              <a:defRPr b="1" sz="1400">
+              <a:defRPr sz="1400" b="1">
                 <a:solidFill>
                   <a:srgbClr val="0F172A"/>
                 </a:solidFill>
@@ -8747,11 +8627,11 @@
           </a:fontRef>
         </p:style>
         <p:txBody>
-          <a:bodyPr rtlCol="0" anchor="ctr" wrap="square" lIns="274320" tIns="182880"/>
+          <a:bodyPr wrap="square" lIns="274320" tIns="182880" rtlCol="0" anchor="ctr"/>
           <a:lstStyle/>
           <a:p>
             <a:pPr algn="ctr">
-              <a:defRPr b="1" sz="950">
+              <a:defRPr sz="950" b="1">
                 <a:solidFill>
                   <a:srgbClr val="0EA5E9"/>
                 </a:solidFill>
@@ -8766,7 +8646,7 @@
               <a:spcBef>
                 <a:spcPts val="300"/>
               </a:spcBef>
-              <a:defRPr b="1" sz="1400">
+              <a:defRPr sz="1400" b="1">
                 <a:solidFill>
                   <a:srgbClr val="0F172A"/>
                 </a:solidFill>
@@ -8831,11 +8711,11 @@
           </a:fontRef>
         </p:style>
         <p:txBody>
-          <a:bodyPr rtlCol="0" anchor="ctr" wrap="square" lIns="274320" tIns="182880"/>
+          <a:bodyPr wrap="square" lIns="274320" tIns="182880" rtlCol="0" anchor="ctr"/>
           <a:lstStyle/>
           <a:p>
             <a:pPr algn="ctr">
-              <a:defRPr b="1" sz="950">
+              <a:defRPr sz="950" b="1">
                 <a:solidFill>
                   <a:srgbClr val="0EA5E9"/>
                 </a:solidFill>
@@ -8850,7 +8730,7 @@
               <a:spcBef>
                 <a:spcPts val="300"/>
               </a:spcBef>
-              <a:defRPr b="1" sz="1400">
+              <a:defRPr sz="1400" b="1">
                 <a:solidFill>
                   <a:srgbClr val="0F172A"/>
                 </a:solidFill>
@@ -8886,7 +8766,7 @@
 </file>
 
 <file path=ppt/slides/slide16.xml><?xml version="1.0" encoding="utf-8"?>
-<p:sld xmlns:a="http://schemas.openxmlformats.org/drawingml/2006/main" xmlns:p="http://schemas.openxmlformats.org/presentationml/2006/main" xmlns:r="http://schemas.openxmlformats.org/officeDocument/2006/relationships">
+<p:sld xmlns:a="http://schemas.openxmlformats.org/drawingml/2006/main" xmlns:r="http://schemas.openxmlformats.org/officeDocument/2006/relationships" xmlns:p="http://schemas.openxmlformats.org/presentationml/2006/main">
   <p:cSld>
     <p:spTree>
       <p:nvGrpSpPr>
@@ -8894,7 +8774,14 @@
         <p:cNvGrpSpPr/>
         <p:nvPr/>
       </p:nvGrpSpPr>
-      <p:grpSpPr/>
+      <p:grpSpPr>
+        <a:xfrm>
+          <a:off x="0" y="0"/>
+          <a:ext cx="0" cy="0"/>
+          <a:chOff x="0" y="0"/>
+          <a:chExt cx="0" cy="0"/>
+        </a:xfrm>
+      </p:grpSpPr>
       <p:sp>
         <p:nvSpPr>
           <p:cNvPr id="2" name="Rectangle 1"/>
@@ -8931,7 +8818,7 @@
           </a:fontRef>
         </p:style>
         <p:txBody>
-          <a:bodyPr rtlCol="0" anchor="ctr" wrap="square" lIns="731520" tIns="164592"/>
+          <a:bodyPr wrap="square" lIns="731520" tIns="164592" rtlCol="0" anchor="ctr"/>
           <a:lstStyle/>
           <a:p>
             <a:pPr algn="ctr">
@@ -9001,6 +8888,7 @@
           <a:lstStyle/>
           <a:p>
             <a:pPr algn="ctr"/>
+            <a:endParaRPr/>
           </a:p>
         </p:txBody>
       </p:sp>
@@ -9078,11 +8966,11 @@
           </a:fontRef>
         </p:style>
         <p:txBody>
-          <a:bodyPr rtlCol="0" anchor="ctr" wrap="square" lIns="228600" tIns="274320"/>
+          <a:bodyPr wrap="square" lIns="228600" tIns="274320" rtlCol="0" anchor="ctr"/>
           <a:lstStyle/>
           <a:p>
             <a:pPr algn="ctr">
-              <a:defRPr b="1" sz="1600">
+              <a:defRPr sz="1600" b="1">
                 <a:solidFill>
                   <a:srgbClr val="0F172A"/>
                 </a:solidFill>
@@ -9097,7 +8985,7 @@
               <a:spcBef>
                 <a:spcPts val="400"/>
               </a:spcBef>
-              <a:defRPr b="1" sz="1050">
+              <a:defRPr sz="1050" b="1">
                 <a:solidFill>
                   <a:srgbClr val="0EA5E9"/>
                 </a:solidFill>
@@ -9164,6 +9052,7 @@
           <a:lstStyle/>
           <a:p>
             <a:pPr algn="ctr"/>
+            <a:endParaRPr/>
           </a:p>
         </p:txBody>
       </p:sp>
@@ -9205,11 +9094,11 @@
           </a:fontRef>
         </p:style>
         <p:txBody>
-          <a:bodyPr rtlCol="0" anchor="ctr" wrap="square" lIns="228600" tIns="274320"/>
+          <a:bodyPr wrap="square" lIns="228600" tIns="274320" rtlCol="0" anchor="ctr"/>
           <a:lstStyle/>
           <a:p>
             <a:pPr algn="ctr">
-              <a:defRPr b="1" sz="1600">
+              <a:defRPr sz="1600" b="1">
                 <a:solidFill>
                   <a:srgbClr val="0F172A"/>
                 </a:solidFill>
@@ -9224,7 +9113,7 @@
               <a:spcBef>
                 <a:spcPts val="400"/>
               </a:spcBef>
-              <a:defRPr b="1" sz="1050">
+              <a:defRPr sz="1050" b="1">
                 <a:solidFill>
                   <a:srgbClr val="0EA5E9"/>
                 </a:solidFill>
@@ -9291,6 +9180,7 @@
           <a:lstStyle/>
           <a:p>
             <a:pPr algn="ctr"/>
+            <a:endParaRPr/>
           </a:p>
         </p:txBody>
       </p:sp>
@@ -9332,11 +9222,11 @@
           </a:fontRef>
         </p:style>
         <p:txBody>
-          <a:bodyPr rtlCol="0" anchor="ctr" wrap="square" lIns="228600" tIns="274320"/>
+          <a:bodyPr wrap="square" lIns="228600" tIns="274320" rtlCol="0" anchor="ctr"/>
           <a:lstStyle/>
           <a:p>
             <a:pPr algn="ctr">
-              <a:defRPr b="1" sz="1600">
+              <a:defRPr sz="1600" b="1">
                 <a:solidFill>
                   <a:srgbClr val="0F172A"/>
                 </a:solidFill>
@@ -9351,7 +9241,7 @@
               <a:spcBef>
                 <a:spcPts val="400"/>
               </a:spcBef>
-              <a:defRPr b="1" sz="1050">
+              <a:defRPr sz="1050" b="1">
                 <a:solidFill>
                   <a:srgbClr val="0EA5E9"/>
                 </a:solidFill>
@@ -9418,6 +9308,7 @@
           <a:lstStyle/>
           <a:p>
             <a:pPr algn="ctr"/>
+            <a:endParaRPr/>
           </a:p>
         </p:txBody>
       </p:sp>
@@ -9457,11 +9348,11 @@
           </a:fontRef>
         </p:style>
         <p:txBody>
-          <a:bodyPr rtlCol="0" anchor="ctr" wrap="square" lIns="365760" tIns="164592"/>
+          <a:bodyPr wrap="square" lIns="365760" tIns="164592" rtlCol="0" anchor="ctr"/>
           <a:lstStyle/>
           <a:p>
             <a:pPr algn="ctr">
-              <a:defRPr b="1" sz="1600">
+              <a:defRPr sz="1600" b="1">
                 <a:solidFill>
                   <a:srgbClr val="FFFFFF"/>
                 </a:solidFill>
@@ -9482,7 +9373,7 @@
 </file>
 
 <file path=ppt/slides/slide17.xml><?xml version="1.0" encoding="utf-8"?>
-<p:sld xmlns:a="http://schemas.openxmlformats.org/drawingml/2006/main" xmlns:p="http://schemas.openxmlformats.org/presentationml/2006/main" xmlns:r="http://schemas.openxmlformats.org/officeDocument/2006/relationships">
+<p:sld xmlns:a="http://schemas.openxmlformats.org/drawingml/2006/main" xmlns:r="http://schemas.openxmlformats.org/officeDocument/2006/relationships" xmlns:p="http://schemas.openxmlformats.org/presentationml/2006/main">
   <p:cSld>
     <p:spTree>
       <p:nvGrpSpPr>
@@ -9490,7 +9381,14 @@
         <p:cNvGrpSpPr/>
         <p:nvPr/>
       </p:nvGrpSpPr>
-      <p:grpSpPr/>
+      <p:grpSpPr>
+        <a:xfrm>
+          <a:off x="0" y="0"/>
+          <a:ext cx="0" cy="0"/>
+          <a:chOff x="0" y="0"/>
+          <a:chExt cx="0" cy="0"/>
+        </a:xfrm>
+      </p:grpSpPr>
       <p:sp>
         <p:nvSpPr>
           <p:cNvPr id="2" name="Rectangle 1"/>
@@ -9527,7 +9425,7 @@
           </a:fontRef>
         </p:style>
         <p:txBody>
-          <a:bodyPr rtlCol="0" anchor="ctr" wrap="square" lIns="731520" tIns="164592"/>
+          <a:bodyPr wrap="square" lIns="731520" tIns="164592" rtlCol="0" anchor="ctr"/>
           <a:lstStyle/>
           <a:p>
             <a:pPr algn="ctr">
@@ -9597,6 +9495,7 @@
           <a:lstStyle/>
           <a:p>
             <a:pPr algn="ctr"/>
+            <a:endParaRPr/>
           </a:p>
         </p:txBody>
       </p:sp>
@@ -9674,11 +9573,11 @@
           </a:fontRef>
         </p:style>
         <p:txBody>
-          <a:bodyPr rtlCol="0" anchor="ctr" wrap="square" lIns="320040" tIns="274320"/>
+          <a:bodyPr wrap="square" lIns="320040" tIns="274320" rtlCol="0" anchor="ctr"/>
           <a:lstStyle/>
           <a:p>
             <a:pPr algn="ctr">
-              <a:defRPr b="1" sz="1600">
+              <a:defRPr sz="1600" b="1">
                 <a:solidFill>
                   <a:srgbClr val="1E3A8A"/>
                 </a:solidFill>
@@ -9693,7 +9592,7 @@
               <a:spcBef>
                 <a:spcPts val="1200"/>
               </a:spcBef>
-              <a:defRPr b="1" sz="1300">
+              <a:defRPr sz="1300" b="1">
                 <a:solidFill>
                   <a:srgbClr val="0F172A"/>
                 </a:solidFill>
@@ -9704,7 +9603,7 @@
             </a:r>
             <a:br/>
             <a:r>
-              <a:rPr b="0" sz="1150">
+              <a:rPr sz="1150" b="0">
                 <a:solidFill>
                   <a:srgbClr val="475569"/>
                 </a:solidFill>
@@ -9717,7 +9616,7 @@
               <a:spcBef>
                 <a:spcPts val="1200"/>
               </a:spcBef>
-              <a:defRPr b="1" sz="1300">
+              <a:defRPr sz="1300" b="1">
                 <a:solidFill>
                   <a:srgbClr val="0F172A"/>
                 </a:solidFill>
@@ -9728,7 +9627,7 @@
             </a:r>
             <a:br/>
             <a:r>
-              <a:rPr b="0" sz="1150">
+              <a:rPr sz="1150" b="0">
                 <a:solidFill>
                   <a:srgbClr val="475569"/>
                 </a:solidFill>
@@ -9741,7 +9640,7 @@
               <a:spcBef>
                 <a:spcPts val="1200"/>
               </a:spcBef>
-              <a:defRPr b="1" sz="1300">
+              <a:defRPr sz="1300" b="1">
                 <a:solidFill>
                   <a:srgbClr val="0F172A"/>
                 </a:solidFill>
@@ -9752,7 +9651,7 @@
             </a:r>
             <a:br/>
             <a:r>
-              <a:rPr b="0" sz="1150">
+              <a:rPr sz="1150" b="0">
                 <a:solidFill>
                   <a:srgbClr val="475569"/>
                 </a:solidFill>
@@ -9765,7 +9664,7 @@
               <a:spcBef>
                 <a:spcPts val="1200"/>
               </a:spcBef>
-              <a:defRPr b="1" sz="1300">
+              <a:defRPr sz="1300" b="1">
                 <a:solidFill>
                   <a:srgbClr val="0F172A"/>
                 </a:solidFill>
@@ -9776,7 +9675,7 @@
             </a:r>
             <a:br/>
             <a:r>
-              <a:rPr b="0" sz="1150">
+              <a:rPr sz="1150" b="0">
                 <a:solidFill>
                   <a:srgbClr val="475569"/>
                 </a:solidFill>
@@ -9824,11 +9723,11 @@
           </a:fontRef>
         </p:style>
         <p:txBody>
-          <a:bodyPr rtlCol="0" anchor="ctr" wrap="square" lIns="365760" tIns="365760"/>
+          <a:bodyPr wrap="square" lIns="365760" tIns="365760" rtlCol="0" anchor="ctr"/>
           <a:lstStyle/>
           <a:p>
             <a:pPr algn="ctr">
-              <a:defRPr b="1" sz="3600">
+              <a:defRPr sz="3600" b="1">
                 <a:solidFill>
                   <a:srgbClr val="FFFFFF"/>
                 </a:solidFill>
@@ -9844,7 +9743,7 @@
               <a:spcBef>
                 <a:spcPts val="400"/>
               </a:spcBef>
-              <a:defRPr b="1" sz="2000">
+              <a:defRPr sz="2000" b="1">
                 <a:solidFill>
                   <a:srgbClr val="0EA5E9"/>
                 </a:solidFill>
@@ -9860,7 +9759,7 @@
               <a:spcBef>
                 <a:spcPts val="1400"/>
               </a:spcBef>
-              <a:defRPr b="1" sz="1300">
+              <a:defRPr sz="1300" b="1">
                 <a:solidFill>
                   <a:srgbClr val="F1F5F9"/>
                 </a:solidFill>
@@ -9940,7 +9839,7 @@
               <a:spcBef>
                 <a:spcPts val="1800"/>
               </a:spcBef>
-              <a:defRPr b="1" sz="1100">
+              <a:defRPr sz="1100" b="1">
                 <a:solidFill>
                   <a:srgbClr val="0EA5E9"/>
                 </a:solidFill>
@@ -9962,7 +9861,7 @@
 </file>
 
 <file path=ppt/slides/slide2.xml><?xml version="1.0" encoding="utf-8"?>
-<p:sld xmlns:a="http://schemas.openxmlformats.org/drawingml/2006/main" xmlns:p="http://schemas.openxmlformats.org/presentationml/2006/main" xmlns:r="http://schemas.openxmlformats.org/officeDocument/2006/relationships">
+<p:sld xmlns:a="http://schemas.openxmlformats.org/drawingml/2006/main" xmlns:r="http://schemas.openxmlformats.org/officeDocument/2006/relationships" xmlns:p="http://schemas.openxmlformats.org/presentationml/2006/main">
   <p:cSld>
     <p:spTree>
       <p:nvGrpSpPr>
@@ -9970,7 +9869,14 @@
         <p:cNvGrpSpPr/>
         <p:nvPr/>
       </p:nvGrpSpPr>
-      <p:grpSpPr/>
+      <p:grpSpPr>
+        <a:xfrm>
+          <a:off x="0" y="0"/>
+          <a:ext cx="0" cy="0"/>
+          <a:chOff x="0" y="0"/>
+          <a:chExt cx="0" cy="0"/>
+        </a:xfrm>
+      </p:grpSpPr>
       <p:sp>
         <p:nvSpPr>
           <p:cNvPr id="2" name="Rectangle 1"/>
@@ -10007,7 +9913,7 @@
           </a:fontRef>
         </p:style>
         <p:txBody>
-          <a:bodyPr rtlCol="0" anchor="ctr" wrap="square" lIns="731520" tIns="164592"/>
+          <a:bodyPr wrap="square" lIns="731520" tIns="164592" rtlCol="0" anchor="ctr"/>
           <a:lstStyle/>
           <a:p>
             <a:pPr algn="ctr">
@@ -10077,6 +9983,7 @@
           <a:lstStyle/>
           <a:p>
             <a:pPr algn="ctr"/>
+            <a:endParaRPr/>
           </a:p>
         </p:txBody>
       </p:sp>
@@ -10154,11 +10061,11 @@
           </a:fontRef>
         </p:style>
         <p:txBody>
-          <a:bodyPr rtlCol="0" anchor="ctr" wrap="square" lIns="365760" tIns="365760"/>
+          <a:bodyPr wrap="square" lIns="365760" tIns="365760" rtlCol="0" anchor="ctr"/>
           <a:lstStyle/>
           <a:p>
             <a:pPr algn="ctr">
-              <a:defRPr b="1" sz="1600">
+              <a:defRPr sz="1600" b="1">
                 <a:solidFill>
                   <a:srgbClr val="1E3A8A"/>
                 </a:solidFill>
@@ -10173,7 +10080,7 @@
               <a:spcBef>
                 <a:spcPts val="800"/>
               </a:spcBef>
-              <a:defRPr b="1" sz="1300">
+              <a:defRPr sz="1300" b="1">
                 <a:solidFill>
                   <a:srgbClr val="0F172A"/>
                 </a:solidFill>
@@ -10196,7 +10103,7 @@
               <a:spcBef>
                 <a:spcPts val="800"/>
               </a:spcBef>
-              <a:defRPr b="1" sz="1300">
+              <a:defRPr sz="1300" b="1">
                 <a:solidFill>
                   <a:srgbClr val="0F172A"/>
                 </a:solidFill>
@@ -10219,7 +10126,7 @@
               <a:spcBef>
                 <a:spcPts val="800"/>
               </a:spcBef>
-              <a:defRPr b="1" sz="1300">
+              <a:defRPr sz="1300" b="1">
                 <a:solidFill>
                   <a:srgbClr val="0F172A"/>
                 </a:solidFill>
@@ -10242,7 +10149,7 @@
               <a:spcBef>
                 <a:spcPts val="800"/>
               </a:spcBef>
-              <a:defRPr b="1" sz="1300">
+              <a:defRPr sz="1300" b="1">
                 <a:solidFill>
                   <a:srgbClr val="0F172A"/>
                 </a:solidFill>
@@ -10265,7 +10172,7 @@
               <a:spcBef>
                 <a:spcPts val="800"/>
               </a:spcBef>
-              <a:defRPr b="1" sz="1300">
+              <a:defRPr sz="1300" b="1">
                 <a:solidFill>
                   <a:srgbClr val="0F172A"/>
                 </a:solidFill>
@@ -10288,7 +10195,7 @@
               <a:spcBef>
                 <a:spcPts val="800"/>
               </a:spcBef>
-              <a:defRPr b="1" sz="1300">
+              <a:defRPr sz="1300" b="1">
                 <a:solidFill>
                   <a:srgbClr val="0F172A"/>
                 </a:solidFill>
@@ -10311,7 +10218,7 @@
               <a:spcBef>
                 <a:spcPts val="800"/>
               </a:spcBef>
-              <a:defRPr b="1" sz="1300">
+              <a:defRPr sz="1300" b="1">
                 <a:solidFill>
                   <a:srgbClr val="0F172A"/>
                 </a:solidFill>
@@ -10369,11 +10276,11 @@
           </a:fontRef>
         </p:style>
         <p:txBody>
-          <a:bodyPr rtlCol="0" anchor="ctr" wrap="square" lIns="365760" tIns="365760"/>
+          <a:bodyPr wrap="square" lIns="365760" tIns="365760" rtlCol="0" anchor="ctr"/>
           <a:lstStyle/>
           <a:p>
             <a:pPr algn="ctr">
-              <a:defRPr b="1" sz="1600">
+              <a:defRPr sz="1600" b="1">
                 <a:solidFill>
                   <a:srgbClr val="1E3A8A"/>
                 </a:solidFill>
@@ -10388,7 +10295,7 @@
               <a:spcBef>
                 <a:spcPts val="800"/>
               </a:spcBef>
-              <a:defRPr b="1" sz="1300">
+              <a:defRPr sz="1300" b="1">
                 <a:solidFill>
                   <a:srgbClr val="0F172A"/>
                 </a:solidFill>
@@ -10411,7 +10318,7 @@
               <a:spcBef>
                 <a:spcPts val="800"/>
               </a:spcBef>
-              <a:defRPr b="1" sz="1300">
+              <a:defRPr sz="1300" b="1">
                 <a:solidFill>
                   <a:srgbClr val="0F172A"/>
                 </a:solidFill>
@@ -10434,7 +10341,7 @@
               <a:spcBef>
                 <a:spcPts val="800"/>
               </a:spcBef>
-              <a:defRPr b="1" sz="1300">
+              <a:defRPr sz="1300" b="1">
                 <a:solidFill>
                   <a:srgbClr val="0F172A"/>
                 </a:solidFill>
@@ -10457,7 +10364,7 @@
               <a:spcBef>
                 <a:spcPts val="800"/>
               </a:spcBef>
-              <a:defRPr b="1" sz="1300">
+              <a:defRPr sz="1300" b="1">
                 <a:solidFill>
                   <a:srgbClr val="0F172A"/>
                 </a:solidFill>
@@ -10480,7 +10387,7 @@
               <a:spcBef>
                 <a:spcPts val="800"/>
               </a:spcBef>
-              <a:defRPr b="1" sz="1300">
+              <a:defRPr sz="1300" b="1">
                 <a:solidFill>
                   <a:srgbClr val="0F172A"/>
                 </a:solidFill>
@@ -10503,7 +10410,7 @@
               <a:spcBef>
                 <a:spcPts val="800"/>
               </a:spcBef>
-              <a:defRPr b="1" sz="1300">
+              <a:defRPr sz="1300" b="1">
                 <a:solidFill>
                   <a:srgbClr val="0F172A"/>
                 </a:solidFill>
@@ -10526,7 +10433,7 @@
               <a:spcBef>
                 <a:spcPts val="800"/>
               </a:spcBef>
-              <a:defRPr b="1" sz="1300">
+              <a:defRPr sz="1300" b="1">
                 <a:solidFill>
                   <a:srgbClr val="0F172A"/>
                 </a:solidFill>
@@ -10555,7 +10462,7 @@
 </file>
 
 <file path=ppt/slides/slide3.xml><?xml version="1.0" encoding="utf-8"?>
-<p:sld xmlns:a="http://schemas.openxmlformats.org/drawingml/2006/main" xmlns:p="http://schemas.openxmlformats.org/presentationml/2006/main" xmlns:r="http://schemas.openxmlformats.org/officeDocument/2006/relationships">
+<p:sld xmlns:a="http://schemas.openxmlformats.org/drawingml/2006/main" xmlns:r="http://schemas.openxmlformats.org/officeDocument/2006/relationships" xmlns:p="http://schemas.openxmlformats.org/presentationml/2006/main">
   <p:cSld>
     <p:spTree>
       <p:nvGrpSpPr>
@@ -10563,7 +10470,14 @@
         <p:cNvGrpSpPr/>
         <p:nvPr/>
       </p:nvGrpSpPr>
-      <p:grpSpPr/>
+      <p:grpSpPr>
+        <a:xfrm>
+          <a:off x="0" y="0"/>
+          <a:ext cx="0" cy="0"/>
+          <a:chOff x="0" y="0"/>
+          <a:chExt cx="0" cy="0"/>
+        </a:xfrm>
+      </p:grpSpPr>
       <p:sp>
         <p:nvSpPr>
           <p:cNvPr id="2" name="Rectangle 1"/>
@@ -10600,7 +10514,7 @@
           </a:fontRef>
         </p:style>
         <p:txBody>
-          <a:bodyPr rtlCol="0" anchor="ctr" wrap="square" lIns="731520" tIns="164592"/>
+          <a:bodyPr wrap="square" lIns="731520" tIns="164592" rtlCol="0" anchor="ctr"/>
           <a:lstStyle/>
           <a:p>
             <a:pPr algn="ctr">
@@ -10670,6 +10584,7 @@
           <a:lstStyle/>
           <a:p>
             <a:pPr algn="ctr"/>
+            <a:endParaRPr/>
           </a:p>
         </p:txBody>
       </p:sp>
@@ -10747,11 +10662,11 @@
           </a:fontRef>
         </p:style>
         <p:txBody>
-          <a:bodyPr rtlCol="0" anchor="ctr" wrap="square" lIns="274320" tIns="274320"/>
+          <a:bodyPr wrap="square" lIns="274320" tIns="274320" rtlCol="0" anchor="ctr"/>
           <a:lstStyle/>
           <a:p>
             <a:pPr algn="ctr">
-              <a:defRPr b="1" sz="1700">
+              <a:defRPr sz="1700" b="1">
                 <a:solidFill>
                   <a:srgbClr val="0F172A"/>
                 </a:solidFill>
@@ -10766,7 +10681,7 @@
               <a:spcAft>
                 <a:spcPts val="1000"/>
               </a:spcAft>
-              <a:defRPr b="1" sz="1100">
+              <a:defRPr sz="1100" b="1">
                 <a:solidFill>
                   <a:srgbClr val="1E3A8A"/>
                 </a:solidFill>
@@ -10878,6 +10793,7 @@
           <a:lstStyle/>
           <a:p>
             <a:pPr algn="ctr"/>
+            <a:endParaRPr/>
           </a:p>
         </p:txBody>
       </p:sp>
@@ -10919,11 +10835,11 @@
           </a:fontRef>
         </p:style>
         <p:txBody>
-          <a:bodyPr rtlCol="0" anchor="ctr" wrap="square" lIns="274320" tIns="274320"/>
+          <a:bodyPr wrap="square" lIns="274320" tIns="274320" rtlCol="0" anchor="ctr"/>
           <a:lstStyle/>
           <a:p>
             <a:pPr algn="ctr">
-              <a:defRPr b="1" sz="1700">
+              <a:defRPr sz="1700" b="1">
                 <a:solidFill>
                   <a:srgbClr val="0F172A"/>
                 </a:solidFill>
@@ -10938,7 +10854,7 @@
               <a:spcAft>
                 <a:spcPts val="1000"/>
               </a:spcAft>
-              <a:defRPr b="1" sz="1100">
+              <a:defRPr sz="1100" b="1">
                 <a:solidFill>
                   <a:srgbClr val="7C3AED"/>
                 </a:solidFill>
@@ -11050,6 +10966,7 @@
           <a:lstStyle/>
           <a:p>
             <a:pPr algn="ctr"/>
+            <a:endParaRPr/>
           </a:p>
         </p:txBody>
       </p:sp>
@@ -11091,11 +11008,11 @@
           </a:fontRef>
         </p:style>
         <p:txBody>
-          <a:bodyPr rtlCol="0" anchor="ctr" wrap="square" lIns="274320" tIns="274320"/>
+          <a:bodyPr wrap="square" lIns="274320" tIns="274320" rtlCol="0" anchor="ctr"/>
           <a:lstStyle/>
           <a:p>
             <a:pPr algn="ctr">
-              <a:defRPr b="1" sz="1700">
+              <a:defRPr sz="1700" b="1">
                 <a:solidFill>
                   <a:srgbClr val="0F172A"/>
                 </a:solidFill>
@@ -11110,7 +11027,7 @@
               <a:spcAft>
                 <a:spcPts val="1000"/>
               </a:spcAft>
-              <a:defRPr b="1" sz="1100">
+              <a:defRPr sz="1100" b="1">
                 <a:solidFill>
                   <a:srgbClr val="0D9488"/>
                 </a:solidFill>
@@ -11222,6 +11139,7 @@
           <a:lstStyle/>
           <a:p>
             <a:pPr algn="ctr"/>
+            <a:endParaRPr/>
           </a:p>
         </p:txBody>
       </p:sp>
@@ -11234,7 +11152,7 @@
 </file>
 
 <file path=ppt/slides/slide4.xml><?xml version="1.0" encoding="utf-8"?>
-<p:sld xmlns:a="http://schemas.openxmlformats.org/drawingml/2006/main" xmlns:p="http://schemas.openxmlformats.org/presentationml/2006/main" xmlns:r="http://schemas.openxmlformats.org/officeDocument/2006/relationships">
+<p:sld xmlns:a="http://schemas.openxmlformats.org/drawingml/2006/main" xmlns:r="http://schemas.openxmlformats.org/officeDocument/2006/relationships" xmlns:p="http://schemas.openxmlformats.org/presentationml/2006/main">
   <p:cSld>
     <p:spTree>
       <p:nvGrpSpPr>
@@ -11242,7 +11160,14 @@
         <p:cNvGrpSpPr/>
         <p:nvPr/>
       </p:nvGrpSpPr>
-      <p:grpSpPr/>
+      <p:grpSpPr>
+        <a:xfrm>
+          <a:off x="0" y="0"/>
+          <a:ext cx="0" cy="0"/>
+          <a:chOff x="0" y="0"/>
+          <a:chExt cx="0" cy="0"/>
+        </a:xfrm>
+      </p:grpSpPr>
       <p:sp>
         <p:nvSpPr>
           <p:cNvPr id="2" name="Rectangle 1"/>
@@ -11279,7 +11204,7 @@
           </a:fontRef>
         </p:style>
         <p:txBody>
-          <a:bodyPr rtlCol="0" anchor="ctr" wrap="square" lIns="731520" tIns="164592"/>
+          <a:bodyPr wrap="square" lIns="731520" tIns="164592" rtlCol="0" anchor="ctr"/>
           <a:lstStyle/>
           <a:p>
             <a:pPr algn="ctr">
@@ -11349,6 +11274,7 @@
           <a:lstStyle/>
           <a:p>
             <a:pPr algn="ctr"/>
+            <a:endParaRPr/>
           </a:p>
         </p:txBody>
       </p:sp>
@@ -11426,11 +11352,11 @@
           </a:fontRef>
         </p:style>
         <p:txBody>
-          <a:bodyPr rtlCol="0" anchor="ctr" wrap="square" lIns="274320" tIns="137160"/>
+          <a:bodyPr wrap="square" lIns="274320" tIns="137160" rtlCol="0" anchor="ctr"/>
           <a:lstStyle/>
           <a:p>
             <a:pPr algn="ctr">
-              <a:defRPr b="1" sz="1400">
+              <a:defRPr sz="1400" b="1">
                 <a:solidFill>
                   <a:srgbClr val="1E3A8A"/>
                 </a:solidFill>
@@ -11507,7 +11433,7 @@
           <a:lstStyle/>
           <a:p>
             <a:pPr algn="ctr">
-              <a:defRPr b="1" sz="1000">
+              <a:defRPr sz="1000" b="1">
                 <a:solidFill>
                   <a:srgbClr val="1E3A8A"/>
                 </a:solidFill>
@@ -11557,11 +11483,11 @@
           </a:fontRef>
         </p:style>
         <p:txBody>
-          <a:bodyPr rtlCol="0" anchor="ctr" wrap="square" lIns="274320" tIns="137160"/>
+          <a:bodyPr wrap="square" lIns="274320" tIns="137160" rtlCol="0" anchor="ctr"/>
           <a:lstStyle/>
           <a:p>
             <a:pPr algn="ctr">
-              <a:defRPr b="1" sz="1400">
+              <a:defRPr sz="1400" b="1">
                 <a:solidFill>
                   <a:srgbClr val="1E3A8A"/>
                 </a:solidFill>
@@ -11638,7 +11564,7 @@
           <a:lstStyle/>
           <a:p>
             <a:pPr algn="ctr">
-              <a:defRPr b="1" sz="1000">
+              <a:defRPr sz="1000" b="1">
                 <a:solidFill>
                   <a:srgbClr val="1E3A8A"/>
                 </a:solidFill>
@@ -11688,11 +11614,11 @@
           </a:fontRef>
         </p:style>
         <p:txBody>
-          <a:bodyPr rtlCol="0" anchor="ctr" wrap="square" lIns="274320" tIns="137160"/>
+          <a:bodyPr wrap="square" lIns="274320" tIns="137160" rtlCol="0" anchor="ctr"/>
           <a:lstStyle/>
           <a:p>
             <a:pPr algn="ctr">
-              <a:defRPr b="1" sz="1400">
+              <a:defRPr sz="1400" b="1">
                 <a:solidFill>
                   <a:srgbClr val="1E3A8A"/>
                 </a:solidFill>
@@ -11769,7 +11695,7 @@
           <a:lstStyle/>
           <a:p>
             <a:pPr algn="ctr">
-              <a:defRPr b="1" sz="1000">
+              <a:defRPr sz="1000" b="1">
                 <a:solidFill>
                   <a:srgbClr val="1E3A8A"/>
                 </a:solidFill>
@@ -11819,11 +11745,11 @@
           </a:fontRef>
         </p:style>
         <p:txBody>
-          <a:bodyPr rtlCol="0" anchor="ctr" wrap="square" lIns="274320" tIns="137160"/>
+          <a:bodyPr wrap="square" lIns="274320" tIns="137160" rtlCol="0" anchor="ctr"/>
           <a:lstStyle/>
           <a:p>
             <a:pPr algn="ctr">
-              <a:defRPr b="1" sz="1400">
+              <a:defRPr sz="1400" b="1">
                 <a:solidFill>
                   <a:srgbClr val="1E3A8A"/>
                 </a:solidFill>
@@ -11900,7 +11826,7 @@
           <a:lstStyle/>
           <a:p>
             <a:pPr algn="ctr">
-              <a:defRPr b="1" sz="1000">
+              <a:defRPr sz="1000" b="1">
                 <a:solidFill>
                   <a:srgbClr val="0EA5E9"/>
                 </a:solidFill>
@@ -11921,7 +11847,7 @@
 </file>
 
 <file path=ppt/slides/slide5.xml><?xml version="1.0" encoding="utf-8"?>
-<p:sld xmlns:a="http://schemas.openxmlformats.org/drawingml/2006/main" xmlns:p="http://schemas.openxmlformats.org/presentationml/2006/main" xmlns:r="http://schemas.openxmlformats.org/officeDocument/2006/relationships">
+<p:sld xmlns:a="http://schemas.openxmlformats.org/drawingml/2006/main" xmlns:r="http://schemas.openxmlformats.org/officeDocument/2006/relationships" xmlns:p="http://schemas.openxmlformats.org/presentationml/2006/main">
   <p:cSld>
     <p:spTree>
       <p:nvGrpSpPr>
@@ -11929,7 +11855,14 @@
         <p:cNvGrpSpPr/>
         <p:nvPr/>
       </p:nvGrpSpPr>
-      <p:grpSpPr/>
+      <p:grpSpPr>
+        <a:xfrm>
+          <a:off x="0" y="0"/>
+          <a:ext cx="0" cy="0"/>
+          <a:chOff x="0" y="0"/>
+          <a:chExt cx="0" cy="0"/>
+        </a:xfrm>
+      </p:grpSpPr>
       <p:sp>
         <p:nvSpPr>
           <p:cNvPr id="2" name="Rectangle 1"/>
@@ -11966,7 +11899,7 @@
           </a:fontRef>
         </p:style>
         <p:txBody>
-          <a:bodyPr rtlCol="0" anchor="ctr" wrap="square" lIns="731520" tIns="164592"/>
+          <a:bodyPr wrap="square" lIns="731520" tIns="164592" rtlCol="0" anchor="ctr"/>
           <a:lstStyle/>
           <a:p>
             <a:pPr algn="ctr">
@@ -12036,6 +11969,7 @@
           <a:lstStyle/>
           <a:p>
             <a:pPr algn="ctr"/>
+            <a:endParaRPr/>
           </a:p>
         </p:txBody>
       </p:sp>
@@ -12113,11 +12047,11 @@
           </a:fontRef>
         </p:style>
         <p:txBody>
-          <a:bodyPr rtlCol="0" anchor="ctr" wrap="square" lIns="274320" tIns="182880"/>
+          <a:bodyPr wrap="square" lIns="274320" tIns="182880" rtlCol="0" anchor="ctr"/>
           <a:lstStyle/>
           <a:p>
             <a:pPr algn="ctr">
-              <a:defRPr b="1" sz="1000">
+              <a:defRPr sz="1000" b="1">
                 <a:solidFill>
                   <a:srgbClr val="DC2626"/>
                 </a:solidFill>
@@ -12132,7 +12066,7 @@
               <a:spcBef>
                 <a:spcPts val="400"/>
               </a:spcBef>
-              <a:defRPr b="1" sz="1500">
+              <a:defRPr sz="1500" b="1">
                 <a:solidFill>
                   <a:srgbClr val="0F172A"/>
                 </a:solidFill>
@@ -12197,11 +12131,11 @@
           </a:fontRef>
         </p:style>
         <p:txBody>
-          <a:bodyPr rtlCol="0" anchor="ctr" wrap="square" lIns="274320" tIns="182880"/>
+          <a:bodyPr wrap="square" lIns="274320" tIns="182880" rtlCol="0" anchor="ctr"/>
           <a:lstStyle/>
           <a:p>
             <a:pPr algn="ctr">
-              <a:defRPr b="1" sz="1000">
+              <a:defRPr sz="1000" b="1">
                 <a:solidFill>
                   <a:srgbClr val="DC2626"/>
                 </a:solidFill>
@@ -12216,7 +12150,7 @@
               <a:spcBef>
                 <a:spcPts val="400"/>
               </a:spcBef>
-              <a:defRPr b="1" sz="1500">
+              <a:defRPr sz="1500" b="1">
                 <a:solidFill>
                   <a:srgbClr val="0F172A"/>
                 </a:solidFill>
@@ -12281,11 +12215,11 @@
           </a:fontRef>
         </p:style>
         <p:txBody>
-          <a:bodyPr rtlCol="0" anchor="ctr" wrap="square" lIns="274320" tIns="182880"/>
+          <a:bodyPr wrap="square" lIns="274320" tIns="182880" rtlCol="0" anchor="ctr"/>
           <a:lstStyle/>
           <a:p>
             <a:pPr algn="ctr">
-              <a:defRPr b="1" sz="1000">
+              <a:defRPr sz="1000" b="1">
                 <a:solidFill>
                   <a:srgbClr val="DC2626"/>
                 </a:solidFill>
@@ -12300,7 +12234,7 @@
               <a:spcBef>
                 <a:spcPts val="400"/>
               </a:spcBef>
-              <a:defRPr b="1" sz="1500">
+              <a:defRPr sz="1500" b="1">
                 <a:solidFill>
                   <a:srgbClr val="0F172A"/>
                 </a:solidFill>
@@ -12365,11 +12299,11 @@
           </a:fontRef>
         </p:style>
         <p:txBody>
-          <a:bodyPr rtlCol="0" anchor="ctr" wrap="square" lIns="274320" tIns="182880"/>
+          <a:bodyPr wrap="square" lIns="274320" tIns="182880" rtlCol="0" anchor="ctr"/>
           <a:lstStyle/>
           <a:p>
             <a:pPr algn="ctr">
-              <a:defRPr b="1" sz="1000">
+              <a:defRPr sz="1000" b="1">
                 <a:solidFill>
                   <a:srgbClr val="DC2626"/>
                 </a:solidFill>
@@ -12384,7 +12318,7 @@
               <a:spcBef>
                 <a:spcPts val="400"/>
               </a:spcBef>
-              <a:defRPr b="1" sz="1500">
+              <a:defRPr sz="1500" b="1">
                 <a:solidFill>
                   <a:srgbClr val="0F172A"/>
                 </a:solidFill>
@@ -12420,7 +12354,7 @@
 </file>
 
 <file path=ppt/slides/slide6.xml><?xml version="1.0" encoding="utf-8"?>
-<p:sld xmlns:a="http://schemas.openxmlformats.org/drawingml/2006/main" xmlns:p="http://schemas.openxmlformats.org/presentationml/2006/main" xmlns:r="http://schemas.openxmlformats.org/officeDocument/2006/relationships">
+<p:sld xmlns:a="http://schemas.openxmlformats.org/drawingml/2006/main" xmlns:r="http://schemas.openxmlformats.org/officeDocument/2006/relationships" xmlns:p="http://schemas.openxmlformats.org/presentationml/2006/main">
   <p:cSld>
     <p:spTree>
       <p:nvGrpSpPr>
@@ -12428,7 +12362,14 @@
         <p:cNvGrpSpPr/>
         <p:nvPr/>
       </p:nvGrpSpPr>
-      <p:grpSpPr/>
+      <p:grpSpPr>
+        <a:xfrm>
+          <a:off x="0" y="0"/>
+          <a:ext cx="0" cy="0"/>
+          <a:chOff x="0" y="0"/>
+          <a:chExt cx="0" cy="0"/>
+        </a:xfrm>
+      </p:grpSpPr>
       <p:sp>
         <p:nvSpPr>
           <p:cNvPr id="2" name="Rectangle 1"/>
@@ -12465,7 +12406,7 @@
           </a:fontRef>
         </p:style>
         <p:txBody>
-          <a:bodyPr rtlCol="0" anchor="ctr" wrap="square" lIns="731520" tIns="164592"/>
+          <a:bodyPr wrap="square" lIns="731520" tIns="164592" rtlCol="0" anchor="ctr"/>
           <a:lstStyle/>
           <a:p>
             <a:pPr algn="ctr">
@@ -12535,6 +12476,7 @@
           <a:lstStyle/>
           <a:p>
             <a:pPr algn="ctr"/>
+            <a:endParaRPr/>
           </a:p>
         </p:txBody>
       </p:sp>
@@ -12612,11 +12554,11 @@
           </a:fontRef>
         </p:style>
         <p:txBody>
-          <a:bodyPr rtlCol="0" anchor="ctr" wrap="square" lIns="228600" tIns="274320"/>
+          <a:bodyPr wrap="square" lIns="228600" tIns="274320" rtlCol="0" anchor="ctr"/>
           <a:lstStyle/>
           <a:p>
             <a:pPr algn="ctr">
-              <a:defRPr b="1" sz="1600">
+              <a:defRPr sz="1600" b="1">
                 <a:solidFill>
                   <a:srgbClr val="0F172A"/>
                 </a:solidFill>
@@ -12631,7 +12573,7 @@
               <a:spcBef>
                 <a:spcPts val="400"/>
               </a:spcBef>
-              <a:defRPr b="1" sz="1000">
+              <a:defRPr sz="1000" b="1">
                 <a:solidFill>
                   <a:srgbClr val="0EA5E9"/>
                 </a:solidFill>
@@ -12698,6 +12640,7 @@
           <a:lstStyle/>
           <a:p>
             <a:pPr algn="ctr"/>
+            <a:endParaRPr/>
           </a:p>
         </p:txBody>
       </p:sp>
@@ -12739,11 +12682,11 @@
           </a:fontRef>
         </p:style>
         <p:txBody>
-          <a:bodyPr rtlCol="0" anchor="ctr" wrap="square" lIns="228600" tIns="274320"/>
+          <a:bodyPr wrap="square" lIns="228600" tIns="274320" rtlCol="0" anchor="ctr"/>
           <a:lstStyle/>
           <a:p>
             <a:pPr algn="ctr">
-              <a:defRPr b="1" sz="1600">
+              <a:defRPr sz="1600" b="1">
                 <a:solidFill>
                   <a:srgbClr val="0F172A"/>
                 </a:solidFill>
@@ -12758,7 +12701,7 @@
               <a:spcBef>
                 <a:spcPts val="400"/>
               </a:spcBef>
-              <a:defRPr b="1" sz="1000">
+              <a:defRPr sz="1000" b="1">
                 <a:solidFill>
                   <a:srgbClr val="0EA5E9"/>
                 </a:solidFill>
@@ -12825,6 +12768,7 @@
           <a:lstStyle/>
           <a:p>
             <a:pPr algn="ctr"/>
+            <a:endParaRPr/>
           </a:p>
         </p:txBody>
       </p:sp>
@@ -12866,11 +12810,11 @@
           </a:fontRef>
         </p:style>
         <p:txBody>
-          <a:bodyPr rtlCol="0" anchor="ctr" wrap="square" lIns="228600" tIns="274320"/>
+          <a:bodyPr wrap="square" lIns="228600" tIns="274320" rtlCol="0" anchor="ctr"/>
           <a:lstStyle/>
           <a:p>
             <a:pPr algn="ctr">
-              <a:defRPr b="1" sz="1600">
+              <a:defRPr sz="1600" b="1">
                 <a:solidFill>
                   <a:srgbClr val="0F172A"/>
                 </a:solidFill>
@@ -12885,7 +12829,7 @@
               <a:spcBef>
                 <a:spcPts val="400"/>
               </a:spcBef>
-              <a:defRPr b="1" sz="1000">
+              <a:defRPr sz="1000" b="1">
                 <a:solidFill>
                   <a:srgbClr val="0EA5E9"/>
                 </a:solidFill>
@@ -12952,6 +12896,7 @@
           <a:lstStyle/>
           <a:p>
             <a:pPr algn="ctr"/>
+            <a:endParaRPr/>
           </a:p>
         </p:txBody>
       </p:sp>
@@ -12993,11 +12938,11 @@
           </a:fontRef>
         </p:style>
         <p:txBody>
-          <a:bodyPr rtlCol="0" anchor="ctr" wrap="square" lIns="228600" tIns="274320"/>
+          <a:bodyPr wrap="square" lIns="228600" tIns="274320" rtlCol="0" anchor="ctr"/>
           <a:lstStyle/>
           <a:p>
             <a:pPr algn="ctr">
-              <a:defRPr b="1" sz="1600">
+              <a:defRPr sz="1600" b="1">
                 <a:solidFill>
                   <a:srgbClr val="0F172A"/>
                 </a:solidFill>
@@ -13012,7 +12957,7 @@
               <a:spcBef>
                 <a:spcPts val="400"/>
               </a:spcBef>
-              <a:defRPr b="1" sz="1000">
+              <a:defRPr sz="1000" b="1">
                 <a:solidFill>
                   <a:srgbClr val="0EA5E9"/>
                 </a:solidFill>
@@ -13079,6 +13024,7 @@
           <a:lstStyle/>
           <a:p>
             <a:pPr algn="ctr"/>
+            <a:endParaRPr/>
           </a:p>
         </p:txBody>
       </p:sp>
@@ -13091,7 +13037,7 @@
 </file>
 
 <file path=ppt/slides/slide7.xml><?xml version="1.0" encoding="utf-8"?>
-<p:sld xmlns:a="http://schemas.openxmlformats.org/drawingml/2006/main" xmlns:p="http://schemas.openxmlformats.org/presentationml/2006/main" xmlns:r="http://schemas.openxmlformats.org/officeDocument/2006/relationships">
+<p:sld xmlns:a="http://schemas.openxmlformats.org/drawingml/2006/main" xmlns:r="http://schemas.openxmlformats.org/officeDocument/2006/relationships" xmlns:p="http://schemas.openxmlformats.org/presentationml/2006/main">
   <p:cSld>
     <p:spTree>
       <p:nvGrpSpPr>
@@ -13099,7 +13045,14 @@
         <p:cNvGrpSpPr/>
         <p:nvPr/>
       </p:nvGrpSpPr>
-      <p:grpSpPr/>
+      <p:grpSpPr>
+        <a:xfrm>
+          <a:off x="0" y="0"/>
+          <a:ext cx="0" cy="0"/>
+          <a:chOff x="0" y="0"/>
+          <a:chExt cx="0" cy="0"/>
+        </a:xfrm>
+      </p:grpSpPr>
       <p:sp>
         <p:nvSpPr>
           <p:cNvPr id="2" name="Rectangle 1"/>
@@ -13136,7 +13089,7 @@
           </a:fontRef>
         </p:style>
         <p:txBody>
-          <a:bodyPr rtlCol="0" anchor="ctr" wrap="square" lIns="731520" tIns="164592"/>
+          <a:bodyPr wrap="square" lIns="731520" tIns="164592" rtlCol="0" anchor="ctr"/>
           <a:lstStyle/>
           <a:p>
             <a:pPr algn="ctr">
@@ -13206,6 +13159,7 @@
           <a:lstStyle/>
           <a:p>
             <a:pPr algn="ctr"/>
+            <a:endParaRPr/>
           </a:p>
         </p:txBody>
       </p:sp>
@@ -13283,11 +13237,11 @@
           </a:fontRef>
         </p:style>
         <p:txBody>
-          <a:bodyPr rtlCol="0" anchor="ctr" wrap="square" lIns="164592" tIns="731520"/>
+          <a:bodyPr wrap="square" lIns="164592" tIns="731520" rtlCol="0" anchor="ctr"/>
           <a:lstStyle/>
           <a:p>
             <a:pPr algn="ctr">
-              <a:defRPr b="1" sz="1400">
+              <a:defRPr sz="1400" b="1">
                 <a:solidFill>
                   <a:srgbClr val="0F172A"/>
                 </a:solidFill>
@@ -13302,7 +13256,7 @@
               <a:spcBef>
                 <a:spcPts val="300"/>
               </a:spcBef>
-              <a:defRPr b="1" sz="900">
+              <a:defRPr sz="900" b="1">
                 <a:solidFill>
                   <a:srgbClr val="0EA5E9"/>
                 </a:solidFill>
@@ -13369,7 +13323,7 @@
           <a:lstStyle/>
           <a:p>
             <a:pPr algn="ctr">
-              <a:defRPr b="1" sz="1300">
+              <a:defRPr sz="1300" b="1">
                 <a:solidFill>
                   <a:srgbClr val="FFFFFF"/>
                 </a:solidFill>
@@ -13419,11 +13373,11 @@
           </a:fontRef>
         </p:style>
         <p:txBody>
-          <a:bodyPr rtlCol="0" anchor="ctr" wrap="square" lIns="164592" tIns="731520"/>
+          <a:bodyPr wrap="square" lIns="164592" tIns="731520" rtlCol="0" anchor="ctr"/>
           <a:lstStyle/>
           <a:p>
             <a:pPr algn="ctr">
-              <a:defRPr b="1" sz="1400">
+              <a:defRPr sz="1400" b="1">
                 <a:solidFill>
                   <a:srgbClr val="0F172A"/>
                 </a:solidFill>
@@ -13438,7 +13392,7 @@
               <a:spcBef>
                 <a:spcPts val="300"/>
               </a:spcBef>
-              <a:defRPr b="1" sz="900">
+              <a:defRPr sz="900" b="1">
                 <a:solidFill>
                   <a:srgbClr val="0EA5E9"/>
                 </a:solidFill>
@@ -13505,7 +13459,7 @@
           <a:lstStyle/>
           <a:p>
             <a:pPr algn="ctr">
-              <a:defRPr b="1" sz="1300">
+              <a:defRPr sz="1300" b="1">
                 <a:solidFill>
                   <a:srgbClr val="FFFFFF"/>
                 </a:solidFill>
@@ -13555,11 +13509,11 @@
           </a:fontRef>
         </p:style>
         <p:txBody>
-          <a:bodyPr rtlCol="0" anchor="ctr" wrap="square" lIns="164592" tIns="731520"/>
+          <a:bodyPr wrap="square" lIns="164592" tIns="731520" rtlCol="0" anchor="ctr"/>
           <a:lstStyle/>
           <a:p>
             <a:pPr algn="ctr">
-              <a:defRPr b="1" sz="1400">
+              <a:defRPr sz="1400" b="1">
                 <a:solidFill>
                   <a:srgbClr val="0F172A"/>
                 </a:solidFill>
@@ -13574,7 +13528,7 @@
               <a:spcBef>
                 <a:spcPts val="300"/>
               </a:spcBef>
-              <a:defRPr b="1" sz="900">
+              <a:defRPr sz="900" b="1">
                 <a:solidFill>
                   <a:srgbClr val="0EA5E9"/>
                 </a:solidFill>
@@ -13641,7 +13595,7 @@
           <a:lstStyle/>
           <a:p>
             <a:pPr algn="ctr">
-              <a:defRPr b="1" sz="1300">
+              <a:defRPr sz="1300" b="1">
                 <a:solidFill>
                   <a:srgbClr val="FFFFFF"/>
                 </a:solidFill>
@@ -13691,11 +13645,11 @@
           </a:fontRef>
         </p:style>
         <p:txBody>
-          <a:bodyPr rtlCol="0" anchor="ctr" wrap="square" lIns="164592" tIns="731520"/>
+          <a:bodyPr wrap="square" lIns="164592" tIns="731520" rtlCol="0" anchor="ctr"/>
           <a:lstStyle/>
           <a:p>
             <a:pPr algn="ctr">
-              <a:defRPr b="1" sz="1400">
+              <a:defRPr sz="1400" b="1">
                 <a:solidFill>
                   <a:srgbClr val="0F172A"/>
                 </a:solidFill>
@@ -13710,7 +13664,7 @@
               <a:spcBef>
                 <a:spcPts val="300"/>
               </a:spcBef>
-              <a:defRPr b="1" sz="900">
+              <a:defRPr sz="900" b="1">
                 <a:solidFill>
                   <a:srgbClr val="0EA5E9"/>
                 </a:solidFill>
@@ -13777,7 +13731,7 @@
           <a:lstStyle/>
           <a:p>
             <a:pPr algn="ctr">
-              <a:defRPr b="1" sz="1300">
+              <a:defRPr sz="1300" b="1">
                 <a:solidFill>
                   <a:srgbClr val="FFFFFF"/>
                 </a:solidFill>
@@ -13827,11 +13781,11 @@
           </a:fontRef>
         </p:style>
         <p:txBody>
-          <a:bodyPr rtlCol="0" anchor="ctr" wrap="square" lIns="164592" tIns="731520"/>
+          <a:bodyPr wrap="square" lIns="164592" tIns="731520" rtlCol="0" anchor="ctr"/>
           <a:lstStyle/>
           <a:p>
             <a:pPr algn="ctr">
-              <a:defRPr b="1" sz="1400">
+              <a:defRPr sz="1400" b="1">
                 <a:solidFill>
                   <a:srgbClr val="0F172A"/>
                 </a:solidFill>
@@ -13846,7 +13800,7 @@
               <a:spcBef>
                 <a:spcPts val="300"/>
               </a:spcBef>
-              <a:defRPr b="1" sz="900">
+              <a:defRPr sz="900" b="1">
                 <a:solidFill>
                   <a:srgbClr val="0EA5E9"/>
                 </a:solidFill>
@@ -13913,7 +13867,7 @@
           <a:lstStyle/>
           <a:p>
             <a:pPr algn="ctr">
-              <a:defRPr b="1" sz="1300">
+              <a:defRPr sz="1300" b="1">
                 <a:solidFill>
                   <a:srgbClr val="FFFFFF"/>
                 </a:solidFill>
@@ -13963,11 +13917,11 @@
           </a:fontRef>
         </p:style>
         <p:txBody>
-          <a:bodyPr rtlCol="0" anchor="ctr" wrap="square" lIns="365760" tIns="137160"/>
+          <a:bodyPr wrap="square" lIns="365760" tIns="137160" rtlCol="0" anchor="ctr"/>
           <a:lstStyle/>
           <a:p>
             <a:pPr algn="ctr">
-              <a:defRPr b="1" sz="1200">
+              <a:defRPr sz="1200" b="1">
                 <a:solidFill>
                   <a:srgbClr val="0EA5E9"/>
                 </a:solidFill>
@@ -13996,7 +13950,7 @@
 </file>
 
 <file path=ppt/slides/slide8.xml><?xml version="1.0" encoding="utf-8"?>
-<p:sld xmlns:a="http://schemas.openxmlformats.org/drawingml/2006/main" xmlns:p="http://schemas.openxmlformats.org/presentationml/2006/main" xmlns:r="http://schemas.openxmlformats.org/officeDocument/2006/relationships">
+<p:sld xmlns:a="http://schemas.openxmlformats.org/drawingml/2006/main" xmlns:r="http://schemas.openxmlformats.org/officeDocument/2006/relationships" xmlns:p="http://schemas.openxmlformats.org/presentationml/2006/main">
   <p:cSld>
     <p:spTree>
       <p:nvGrpSpPr>
@@ -14004,7 +13958,14 @@
         <p:cNvGrpSpPr/>
         <p:nvPr/>
       </p:nvGrpSpPr>
-      <p:grpSpPr/>
+      <p:grpSpPr>
+        <a:xfrm>
+          <a:off x="0" y="0"/>
+          <a:ext cx="0" cy="0"/>
+          <a:chOff x="0" y="0"/>
+          <a:chExt cx="0" cy="0"/>
+        </a:xfrm>
+      </p:grpSpPr>
       <p:sp>
         <p:nvSpPr>
           <p:cNvPr id="2" name="Rectangle 1"/>
@@ -14041,7 +14002,7 @@
           </a:fontRef>
         </p:style>
         <p:txBody>
-          <a:bodyPr rtlCol="0" anchor="ctr" wrap="square" lIns="731520" tIns="164592"/>
+          <a:bodyPr wrap="square" lIns="731520" tIns="164592" rtlCol="0" anchor="ctr"/>
           <a:lstStyle/>
           <a:p>
             <a:pPr algn="ctr">
@@ -14111,6 +14072,7 @@
           <a:lstStyle/>
           <a:p>
             <a:pPr algn="ctr"/>
+            <a:endParaRPr/>
           </a:p>
         </p:txBody>
       </p:sp>
@@ -14188,11 +14150,11 @@
           </a:fontRef>
         </p:style>
         <p:txBody>
-          <a:bodyPr rtlCol="0" anchor="ctr" wrap="square" lIns="274320" tIns="182880"/>
+          <a:bodyPr wrap="square" lIns="274320" tIns="182880" rtlCol="0" anchor="ctr"/>
           <a:lstStyle/>
           <a:p>
             <a:pPr algn="ctr">
-              <a:defRPr b="1" sz="1500">
+              <a:defRPr sz="1500" b="1">
                 <a:solidFill>
                   <a:srgbClr val="0F172A"/>
                 </a:solidFill>
@@ -14289,6 +14251,7 @@
           <a:lstStyle/>
           <a:p>
             <a:pPr algn="ctr"/>
+            <a:endParaRPr/>
           </a:p>
         </p:txBody>
       </p:sp>
@@ -14330,11 +14293,11 @@
           </a:fontRef>
         </p:style>
         <p:txBody>
-          <a:bodyPr rtlCol="0" anchor="ctr" wrap="square" lIns="274320" tIns="182880"/>
+          <a:bodyPr wrap="square" lIns="274320" tIns="182880" rtlCol="0" anchor="ctr"/>
           <a:lstStyle/>
           <a:p>
             <a:pPr algn="ctr">
-              <a:defRPr b="1" sz="1500">
+              <a:defRPr sz="1500" b="1">
                 <a:solidFill>
                   <a:srgbClr val="0F172A"/>
                 </a:solidFill>
@@ -14431,6 +14394,7 @@
           <a:lstStyle/>
           <a:p>
             <a:pPr algn="ctr"/>
+            <a:endParaRPr/>
           </a:p>
         </p:txBody>
       </p:sp>
@@ -14472,11 +14436,11 @@
           </a:fontRef>
         </p:style>
         <p:txBody>
-          <a:bodyPr rtlCol="0" anchor="ctr" wrap="square" lIns="274320" tIns="182880"/>
+          <a:bodyPr wrap="square" lIns="274320" tIns="182880" rtlCol="0" anchor="ctr"/>
           <a:lstStyle/>
           <a:p>
             <a:pPr algn="ctr">
-              <a:defRPr b="1" sz="1500">
+              <a:defRPr sz="1500" b="1">
                 <a:solidFill>
                   <a:srgbClr val="0F172A"/>
                 </a:solidFill>
@@ -14573,6 +14537,7 @@
           <a:lstStyle/>
           <a:p>
             <a:pPr algn="ctr"/>
+            <a:endParaRPr/>
           </a:p>
         </p:txBody>
       </p:sp>
@@ -14614,11 +14579,11 @@
           </a:fontRef>
         </p:style>
         <p:txBody>
-          <a:bodyPr rtlCol="0" anchor="ctr" wrap="square" lIns="274320" tIns="182880"/>
+          <a:bodyPr wrap="square" lIns="274320" tIns="182880" rtlCol="0" anchor="ctr"/>
           <a:lstStyle/>
           <a:p>
             <a:pPr algn="ctr">
-              <a:defRPr b="1" sz="1500">
+              <a:defRPr sz="1500" b="1">
                 <a:solidFill>
                   <a:srgbClr val="0F172A"/>
                 </a:solidFill>
@@ -14715,6 +14680,7 @@
           <a:lstStyle/>
           <a:p>
             <a:pPr algn="ctr"/>
+            <a:endParaRPr/>
           </a:p>
         </p:txBody>
       </p:sp>
@@ -14727,7 +14693,7 @@
 </file>
 
 <file path=ppt/slides/slide9.xml><?xml version="1.0" encoding="utf-8"?>
-<p:sld xmlns:a="http://schemas.openxmlformats.org/drawingml/2006/main" xmlns:p="http://schemas.openxmlformats.org/presentationml/2006/main" xmlns:r="http://schemas.openxmlformats.org/officeDocument/2006/relationships">
+<p:sld xmlns:a="http://schemas.openxmlformats.org/drawingml/2006/main" xmlns:r="http://schemas.openxmlformats.org/officeDocument/2006/relationships" xmlns:p="http://schemas.openxmlformats.org/presentationml/2006/main">
   <p:cSld>
     <p:spTree>
       <p:nvGrpSpPr>
@@ -14735,7 +14701,14 @@
         <p:cNvGrpSpPr/>
         <p:nvPr/>
       </p:nvGrpSpPr>
-      <p:grpSpPr/>
+      <p:grpSpPr>
+        <a:xfrm>
+          <a:off x="0" y="0"/>
+          <a:ext cx="0" cy="0"/>
+          <a:chOff x="0" y="0"/>
+          <a:chExt cx="0" cy="0"/>
+        </a:xfrm>
+      </p:grpSpPr>
       <p:sp>
         <p:nvSpPr>
           <p:cNvPr id="2" name="Rectangle 1"/>
@@ -14772,7 +14745,7 @@
           </a:fontRef>
         </p:style>
         <p:txBody>
-          <a:bodyPr rtlCol="0" anchor="ctr" wrap="square" lIns="731520" tIns="164592"/>
+          <a:bodyPr wrap="square" lIns="731520" tIns="164592" rtlCol="0" anchor="ctr"/>
           <a:lstStyle/>
           <a:p>
             <a:pPr algn="ctr">
@@ -14842,6 +14815,7 @@
           <a:lstStyle/>
           <a:p>
             <a:pPr algn="ctr"/>
+            <a:endParaRPr/>
           </a:p>
         </p:txBody>
       </p:sp>
@@ -14919,11 +14893,11 @@
           </a:fontRef>
         </p:style>
         <p:txBody>
-          <a:bodyPr rtlCol="0" anchor="ctr" wrap="square" lIns="274320" tIns="182880"/>
+          <a:bodyPr wrap="square" lIns="274320" tIns="182880" rtlCol="0" anchor="ctr"/>
           <a:lstStyle/>
           <a:p>
             <a:pPr algn="ctr">
-              <a:defRPr b="1" sz="1500">
+              <a:defRPr sz="1500" b="1">
                 <a:solidFill>
                   <a:srgbClr val="1E3A8A"/>
                 </a:solidFill>
@@ -14938,7 +14912,7 @@
               <a:spcBef>
                 <a:spcPts val="300"/>
               </a:spcBef>
-              <a:defRPr b="1" sz="1000">
+              <a:defRPr sz="1000" b="1">
                 <a:solidFill>
                   <a:srgbClr val="0D9488"/>
                 </a:solidFill>
@@ -15003,11 +14977,11 @@
           </a:fontRef>
         </p:style>
         <p:txBody>
-          <a:bodyPr rtlCol="0" anchor="ctr" wrap="square" lIns="274320" tIns="182880"/>
+          <a:bodyPr wrap="square" lIns="274320" tIns="182880" rtlCol="0" anchor="ctr"/>
           <a:lstStyle/>
           <a:p>
             <a:pPr algn="ctr">
-              <a:defRPr b="1" sz="1500">
+              <a:defRPr sz="1500" b="1">
                 <a:solidFill>
                   <a:srgbClr val="1E3A8A"/>
                 </a:solidFill>
@@ -15022,7 +14996,7 @@
               <a:spcBef>
                 <a:spcPts val="300"/>
               </a:spcBef>
-              <a:defRPr b="1" sz="1000">
+              <a:defRPr sz="1000" b="1">
                 <a:solidFill>
                   <a:srgbClr val="0D9488"/>
                 </a:solidFill>
@@ -15087,11 +15061,11 @@
           </a:fontRef>
         </p:style>
         <p:txBody>
-          <a:bodyPr rtlCol="0" anchor="ctr" wrap="square" lIns="274320" tIns="182880"/>
+          <a:bodyPr wrap="square" lIns="274320" tIns="182880" rtlCol="0" anchor="ctr"/>
           <a:lstStyle/>
           <a:p>
             <a:pPr algn="ctr">
-              <a:defRPr b="1" sz="1500">
+              <a:defRPr sz="1500" b="1">
                 <a:solidFill>
                   <a:srgbClr val="1E3A8A"/>
                 </a:solidFill>
@@ -15106,7 +15080,7 @@
               <a:spcBef>
                 <a:spcPts val="300"/>
               </a:spcBef>
-              <a:defRPr b="1" sz="1000">
+              <a:defRPr sz="1000" b="1">
                 <a:solidFill>
                   <a:srgbClr val="0D9488"/>
                 </a:solidFill>
@@ -15171,11 +15145,11 @@
           </a:fontRef>
         </p:style>
         <p:txBody>
-          <a:bodyPr rtlCol="0" anchor="ctr" wrap="square" lIns="274320" tIns="182880"/>
+          <a:bodyPr wrap="square" lIns="274320" tIns="182880" rtlCol="0" anchor="ctr"/>
           <a:lstStyle/>
           <a:p>
             <a:pPr algn="ctr">
-              <a:defRPr b="1" sz="1500">
+              <a:defRPr sz="1500" b="1">
                 <a:solidFill>
                   <a:srgbClr val="1E3A8A"/>
                 </a:solidFill>
@@ -15190,7 +15164,7 @@
               <a:spcBef>
                 <a:spcPts val="300"/>
               </a:spcBef>
-              <a:defRPr b="1" sz="1000">
+              <a:defRPr sz="1000" b="1">
                 <a:solidFill>
                   <a:srgbClr val="0D9488"/>
                 </a:solidFill>
@@ -15556,44 +15530,44 @@
         <a:sysClr val="window" lastClr="FFFFFF"/>
       </a:lt1>
       <a:dk2>
-        <a:srgbClr val="1F497D"/>
+        <a:srgbClr val="0E2841"/>
       </a:dk2>
       <a:lt2>
-        <a:srgbClr val="EEECE1"/>
+        <a:srgbClr val="E8E8E8"/>
       </a:lt2>
       <a:accent1>
-        <a:srgbClr val="4F81BD"/>
+        <a:srgbClr val="156082"/>
       </a:accent1>
       <a:accent2>
-        <a:srgbClr val="C0504D"/>
+        <a:srgbClr val="E97132"/>
       </a:accent2>
       <a:accent3>
-        <a:srgbClr val="9BBB59"/>
+        <a:srgbClr val="196B24"/>
       </a:accent3>
       <a:accent4>
-        <a:srgbClr val="8064A2"/>
+        <a:srgbClr val="0F9ED5"/>
       </a:accent4>
       <a:accent5>
-        <a:srgbClr val="4BACC6"/>
+        <a:srgbClr val="A02B93"/>
       </a:accent5>
       <a:accent6>
-        <a:srgbClr val="F79646"/>
+        <a:srgbClr val="4EA72E"/>
       </a:accent6>
       <a:hlink>
-        <a:srgbClr val="0000FF"/>
+        <a:srgbClr val="467886"/>
       </a:hlink>
       <a:folHlink>
-        <a:srgbClr val="800080"/>
+        <a:srgbClr val="96607D"/>
       </a:folHlink>
     </a:clrScheme>
     <a:fontScheme name="Office">
       <a:majorFont>
-        <a:latin typeface="Calibri"/>
+        <a:latin typeface="Aptos Display" panose="02110004020202020204"/>
         <a:ea typeface=""/>
         <a:cs typeface=""/>
-        <a:font script="Jpan" typeface="ＭＳ Ｐゴシック"/>
+        <a:font script="Jpan" typeface="游ゴシック Light"/>
         <a:font script="Hang" typeface="맑은 고딕"/>
-        <a:font script="Hans" typeface="宋体"/>
+        <a:font script="Hans" typeface="等线 Light"/>
         <a:font script="Hant" typeface="新細明體"/>
         <a:font script="Arab" typeface="Times New Roman"/>
         <a:font script="Hebr" typeface="Times New Roman"/>
@@ -15621,14 +15595,31 @@
         <a:font script="Viet" typeface="Times New Roman"/>
         <a:font script="Uigh" typeface="Microsoft Uighur"/>
         <a:font script="Geor" typeface="Sylfaen"/>
+        <a:font script="Armn" typeface="Arial"/>
+        <a:font script="Bugi" typeface="Leelawadee UI"/>
+        <a:font script="Bopo" typeface="Microsoft JhengHei"/>
+        <a:font script="Java" typeface="Javanese Text"/>
+        <a:font script="Lisu" typeface="Segoe UI"/>
+        <a:font script="Mymr" typeface="Myanmar Text"/>
+        <a:font script="Nkoo" typeface="Ebrima"/>
+        <a:font script="Olck" typeface="Nirmala UI"/>
+        <a:font script="Osma" typeface="Ebrima"/>
+        <a:font script="Phag" typeface="Phagspa"/>
+        <a:font script="Syrn" typeface="Estrangelo Edessa"/>
+        <a:font script="Syrj" typeface="Estrangelo Edessa"/>
+        <a:font script="Syre" typeface="Estrangelo Edessa"/>
+        <a:font script="Sora" typeface="Nirmala UI"/>
+        <a:font script="Tale" typeface="Microsoft Tai Le"/>
+        <a:font script="Talu" typeface="Microsoft New Tai Lue"/>
+        <a:font script="Tfng" typeface="Ebrima"/>
       </a:majorFont>
       <a:minorFont>
-        <a:latin typeface="Calibri"/>
+        <a:latin typeface="Aptos" panose="02110004020202020204"/>
         <a:ea typeface=""/>
         <a:cs typeface=""/>
-        <a:font script="Jpan" typeface="ＭＳ Ｐゴシック"/>
+        <a:font script="Jpan" typeface="游ゴシック"/>
         <a:font script="Hang" typeface="맑은 고딕"/>
-        <a:font script="Hans" typeface="宋体"/>
+        <a:font script="Hans" typeface="等线"/>
         <a:font script="Hant" typeface="新細明體"/>
         <a:font script="Arab" typeface="Arial"/>
         <a:font script="Hebr" typeface="Arial"/>
@@ -15656,6 +15647,23 @@
         <a:font script="Viet" typeface="Arial"/>
         <a:font script="Uigh" typeface="Microsoft Uighur"/>
         <a:font script="Geor" typeface="Sylfaen"/>
+        <a:font script="Armn" typeface="Arial"/>
+        <a:font script="Bugi" typeface="Leelawadee UI"/>
+        <a:font script="Bopo" typeface="Microsoft JhengHei"/>
+        <a:font script="Java" typeface="Javanese Text"/>
+        <a:font script="Lisu" typeface="Segoe UI"/>
+        <a:font script="Mymr" typeface="Myanmar Text"/>
+        <a:font script="Nkoo" typeface="Ebrima"/>
+        <a:font script="Olck" typeface="Nirmala UI"/>
+        <a:font script="Osma" typeface="Ebrima"/>
+        <a:font script="Phag" typeface="Phagspa"/>
+        <a:font script="Syrn" typeface="Estrangelo Edessa"/>
+        <a:font script="Syrj" typeface="Estrangelo Edessa"/>
+        <a:font script="Syre" typeface="Estrangelo Edessa"/>
+        <a:font script="Sora" typeface="Nirmala UI"/>
+        <a:font script="Tale" typeface="Microsoft Tai Le"/>
+        <a:font script="Talu" typeface="Microsoft New Tai Lue"/>
+        <a:font script="Tfng" typeface="Ebrima"/>
       </a:minorFont>
     </a:fontScheme>
     <a:fmtScheme name="Office">
@@ -15667,180 +15675,136 @@
           <a:gsLst>
             <a:gs pos="0">
               <a:schemeClr val="phClr">
-                <a:tint val="50000"/>
-                <a:satMod val="300000"/>
+                <a:lumMod val="110000"/>
+                <a:satMod val="105000"/>
+                <a:tint val="67000"/>
               </a:schemeClr>
             </a:gs>
-            <a:gs pos="35000">
+            <a:gs pos="50000">
               <a:schemeClr val="phClr">
-                <a:tint val="37000"/>
-                <a:satMod val="300000"/>
+                <a:lumMod val="105000"/>
+                <a:satMod val="103000"/>
+                <a:tint val="73000"/>
               </a:schemeClr>
             </a:gs>
             <a:gs pos="100000">
               <a:schemeClr val="phClr">
-                <a:tint val="15000"/>
-                <a:satMod val="350000"/>
+                <a:lumMod val="105000"/>
+                <a:satMod val="109000"/>
+                <a:tint val="81000"/>
               </a:schemeClr>
             </a:gs>
           </a:gsLst>
-          <a:lin ang="16200000" scaled="1"/>
+          <a:lin ang="5400000" scaled="0"/>
         </a:gradFill>
         <a:gradFill rotWithShape="1">
           <a:gsLst>
             <a:gs pos="0">
               <a:schemeClr val="phClr">
-                <a:tint val="100000"/>
+                <a:satMod val="103000"/>
+                <a:lumMod val="102000"/>
+                <a:tint val="94000"/>
+              </a:schemeClr>
+            </a:gs>
+            <a:gs pos="50000">
+              <a:schemeClr val="phClr">
+                <a:satMod val="110000"/>
+                <a:lumMod val="100000"/>
                 <a:shade val="100000"/>
-                <a:satMod val="130000"/>
               </a:schemeClr>
             </a:gs>
             <a:gs pos="100000">
               <a:schemeClr val="phClr">
-                <a:tint val="50000"/>
-                <a:shade val="100000"/>
-                <a:satMod val="350000"/>
+                <a:lumMod val="99000"/>
+                <a:satMod val="120000"/>
+                <a:shade val="78000"/>
               </a:schemeClr>
             </a:gs>
           </a:gsLst>
-          <a:lin ang="16200000" scaled="0"/>
+          <a:lin ang="5400000" scaled="0"/>
         </a:gradFill>
       </a:fillStyleLst>
       <a:lnStyleLst>
-        <a:ln w="9525" cap="flat" cmpd="sng" algn="ctr">
+        <a:ln w="12700" cap="flat" cmpd="sng" algn="ctr">
           <a:solidFill>
-            <a:schemeClr val="phClr">
-              <a:shade val="95000"/>
-              <a:satMod val="105000"/>
-            </a:schemeClr>
+            <a:schemeClr val="phClr"/>
           </a:solidFill>
           <a:prstDash val="solid"/>
+          <a:miter lim="800000"/>
+        </a:ln>
+        <a:ln w="19050" cap="flat" cmpd="sng" algn="ctr">
+          <a:solidFill>
+            <a:schemeClr val="phClr"/>
+          </a:solidFill>
+          <a:prstDash val="solid"/>
+          <a:miter lim="800000"/>
         </a:ln>
         <a:ln w="25400" cap="flat" cmpd="sng" algn="ctr">
           <a:solidFill>
             <a:schemeClr val="phClr"/>
           </a:solidFill>
           <a:prstDash val="solid"/>
-        </a:ln>
-        <a:ln w="38100" cap="flat" cmpd="sng" algn="ctr">
-          <a:solidFill>
-            <a:schemeClr val="phClr"/>
-          </a:solidFill>
-          <a:prstDash val="solid"/>
+          <a:miter lim="800000"/>
         </a:ln>
       </a:lnStyleLst>
       <a:effectStyleLst>
         <a:effectStyle>
+          <a:effectLst/>
+        </a:effectStyle>
+        <a:effectStyle>
+          <a:effectLst/>
+        </a:effectStyle>
+        <a:effectStyle>
           <a:effectLst>
-            <a:outerShdw blurRad="40000" dist="20000" dir="5400000" rotWithShape="0">
+            <a:outerShdw blurRad="57150" dist="19050" dir="5400000" algn="ctr" rotWithShape="0">
               <a:srgbClr val="000000">
-                <a:alpha val="38000"/>
+                <a:alpha val="63000"/>
               </a:srgbClr>
             </a:outerShdw>
           </a:effectLst>
-        </a:effectStyle>
-        <a:effectStyle>
-          <a:effectLst>
-            <a:outerShdw blurRad="40000" dist="23000" dir="5400000" rotWithShape="0">
-              <a:srgbClr val="000000">
-                <a:alpha val="35000"/>
-              </a:srgbClr>
-            </a:outerShdw>
-          </a:effectLst>
-        </a:effectStyle>
-        <a:effectStyle>
-          <a:effectLst>
-            <a:outerShdw blurRad="40000" dist="23000" dir="5400000" rotWithShape="0">
-              <a:srgbClr val="000000">
-                <a:alpha val="35000"/>
-              </a:srgbClr>
-            </a:outerShdw>
-          </a:effectLst>
-          <a:scene3d>
-            <a:camera prst="orthographicFront">
-              <a:rot lat="0" lon="0" rev="0"/>
-            </a:camera>
-            <a:lightRig rig="threePt" dir="t">
-              <a:rot lat="0" lon="0" rev="1200000"/>
-            </a:lightRig>
-          </a:scene3d>
-          <a:sp3d>
-            <a:bevelT w="63500" h="25400"/>
-          </a:sp3d>
         </a:effectStyle>
       </a:effectStyleLst>
       <a:bgFillStyleLst>
         <a:solidFill>
           <a:schemeClr val="phClr"/>
         </a:solidFill>
+        <a:solidFill>
+          <a:schemeClr val="phClr">
+            <a:tint val="95000"/>
+            <a:satMod val="170000"/>
+          </a:schemeClr>
+        </a:solidFill>
         <a:gradFill rotWithShape="1">
           <a:gsLst>
             <a:gs pos="0">
               <a:schemeClr val="phClr">
-                <a:tint val="40000"/>
-                <a:satMod val="350000"/>
+                <a:tint val="93000"/>
+                <a:satMod val="150000"/>
+                <a:shade val="98000"/>
+                <a:lumMod val="102000"/>
               </a:schemeClr>
             </a:gs>
-            <a:gs pos="40000">
+            <a:gs pos="50000">
               <a:schemeClr val="phClr">
-                <a:tint val="45000"/>
-                <a:shade val="99000"/>
-                <a:satMod val="350000"/>
+                <a:tint val="98000"/>
+                <a:satMod val="130000"/>
+                <a:shade val="90000"/>
+                <a:lumMod val="103000"/>
               </a:schemeClr>
             </a:gs>
             <a:gs pos="100000">
               <a:schemeClr val="phClr">
-                <a:shade val="20000"/>
-                <a:satMod val="255000"/>
+                <a:shade val="63000"/>
+                <a:satMod val="120000"/>
               </a:schemeClr>
             </a:gs>
           </a:gsLst>
-          <a:path path="circle">
-            <a:fillToRect l="50000" t="-80000" r="50000" b="180000"/>
-          </a:path>
-        </a:gradFill>
-        <a:gradFill rotWithShape="1">
-          <a:gsLst>
-            <a:gs pos="0">
-              <a:schemeClr val="phClr">
-                <a:tint val="80000"/>
-                <a:satMod val="300000"/>
-              </a:schemeClr>
-            </a:gs>
-            <a:gs pos="100000">
-              <a:schemeClr val="phClr">
-                <a:shade val="30000"/>
-                <a:satMod val="200000"/>
-              </a:schemeClr>
-            </a:gs>
-          </a:gsLst>
-          <a:path path="circle">
-            <a:fillToRect l="50000" t="50000" r="50000" b="50000"/>
-          </a:path>
+          <a:lin ang="5400000" scaled="0"/>
         </a:gradFill>
       </a:bgFillStyleLst>
     </a:fmtScheme>
   </a:themeElements>
   <a:objectDefaults>
-    <a:spDef>
-      <a:spPr/>
-      <a:bodyPr/>
-      <a:lstStyle/>
-      <a:style>
-        <a:lnRef idx="1">
-          <a:schemeClr val="accent1"/>
-        </a:lnRef>
-        <a:fillRef idx="3">
-          <a:schemeClr val="accent1"/>
-        </a:fillRef>
-        <a:effectRef idx="2">
-          <a:schemeClr val="accent1"/>
-        </a:effectRef>
-        <a:fontRef idx="minor">
-          <a:schemeClr val="lt1"/>
-        </a:fontRef>
-      </a:style>
-    </a:spDef>
     <a:lnDef>
       <a:spPr/>
       <a:bodyPr/>
@@ -15862,5 +15826,10 @@
     </a:lnDef>
   </a:objectDefaults>
   <a:extraClrSchemeLst/>
+  <a:extLst>
+    <a:ext uri="{05A4C25C-085E-4340-85A3-A5531E510DB2}">
+      <thm15:themeFamily xmlns:thm15="http://schemas.microsoft.com/office/thememl/2012/main" name="Office Theme" id="{2E142A2C-CD16-42D6-873A-C26D2A0506FA}" vid="{1BDDFF52-6CD6-40A5-AB3C-68EB2F1E4D0A}"/>
+    </a:ext>
+  </a:extLst>
 </a:theme>
 </file>